--- a/output/wordlabs-connect-3day.pptx
+++ b/output/wordlabs-connect-3day.pptx
@@ -6071,7 +6071,7 @@
                 <a:ea typeface="Calibri" pitchFamily="34" charset="-122"/>
                 <a:cs typeface="Calibri" pitchFamily="34" charset="-120"/>
               </a:rPr>
-              <a:t> the cable and then </a:t>
+              <a:t> the cable before we </a:t>
             </a:r>
             <a:pPr algn="l" indent="0" marL="0">
               <a:buNone/>
@@ -6102,7 +6102,7 @@
                 <a:ea typeface="Calibri" pitchFamily="34" charset="-122"/>
                 <a:cs typeface="Calibri" pitchFamily="34" charset="-120"/>
               </a:rPr>
-              <a:t> it to the correct port?</a:t>
+              <a:t> it to the new device?</a:t>
             </a:r>
             <a:endParaRPr lang="en-US" sz="1800" dirty="0"/>
           </a:p>
@@ -7860,7 +7860,7 @@
                 <a:ea typeface="Calibri" pitchFamily="34" charset="-122"/>
                 <a:cs typeface="Calibri" pitchFamily="34" charset="-120"/>
               </a:rPr>
-              <a:t>not or apart</a:t>
+              <a:t>not, apart, away</a:t>
             </a:r>
             <a:endParaRPr lang="en-US" sz="850" dirty="0"/>
           </a:p>
@@ -8845,7 +8845,7 @@
                 <a:ea typeface="Calibri" pitchFamily="34" charset="-122"/>
                 <a:cs typeface="Calibri" pitchFamily="34" charset="-120"/>
               </a:rPr>
-              <a:t>not or apart</a:t>
+              <a:t>not, apart, away</a:t>
             </a:r>
             <a:endParaRPr lang="en-US" sz="850" dirty="0"/>
           </a:p>
@@ -10067,7 +10067,7 @@
                 <a:ea typeface="Calibri" pitchFamily="34" charset="-122"/>
                 <a:cs typeface="Calibri" pitchFamily="34" charset="-120"/>
               </a:rPr>
-              <a:t>not or apart</a:t>
+              <a:t>not, apart, away</a:t>
             </a:r>
             <a:endParaRPr lang="en-US" sz="850" dirty="0"/>
           </a:p>
@@ -17626,7 +17626,7 @@
                 <a:ea typeface="Calibri" pitchFamily="34" charset="-122"/>
                 <a:cs typeface="Calibri" pitchFamily="34" charset="-120"/>
               </a:rPr>
-              <a:t> rivers create a strong </a:t>
+              <a:t> systems make a strong </a:t>
             </a:r>
             <a:pPr algn="l" indent="0" marL="0">
               <a:buNone/>
@@ -17657,7 +17657,7 @@
                 <a:ea typeface="Calibri" pitchFamily="34" charset="-122"/>
                 <a:cs typeface="Calibri" pitchFamily="34" charset="-120"/>
               </a:rPr>
-              <a:t>, but flooding can </a:t>
+              <a:t> possible, so </a:t>
             </a:r>
             <a:pPr algn="l" indent="0" marL="0">
               <a:buNone/>
@@ -17674,7 +17674,7 @@
                 <a:ea typeface="Calibri" pitchFamily="34" charset="-122"/>
                 <a:cs typeface="Calibri" pitchFamily="34" charset="-120"/>
               </a:rPr>
-              <a:t>disconnect</a:t>
+              <a:t>connecting</a:t>
             </a:r>
             <a:pPr algn="l" indent="0" marL="0">
               <a:buNone/>
@@ -17688,7 +17688,7 @@
                 <a:ea typeface="Calibri" pitchFamily="34" charset="-122"/>
                 <a:cs typeface="Calibri" pitchFamily="34" charset="-120"/>
               </a:rPr>
-              <a:t> entire towns.</a:t>
+              <a:t> them correctly is very important.</a:t>
             </a:r>
             <a:endParaRPr lang="en-US" sz="1800" dirty="0"/>
           </a:p>
@@ -18099,7 +18099,7 @@
                 <a:ea typeface="Trebuchet MS" pitchFamily="34" charset="-122"/>
                 <a:cs typeface="Trebuchet MS" pitchFamily="34" charset="-120"/>
               </a:rPr>
-              <a:t>disconnect</a:t>
+              <a:t>connecting</a:t>
             </a:r>
             <a:endParaRPr lang="en-US" sz="1400" dirty="0"/>
           </a:p>
@@ -19574,7 +19574,7 @@
                 <a:ea typeface="Calibri" pitchFamily="34" charset="-122"/>
                 <a:cs typeface="Calibri" pitchFamily="34" charset="-120"/>
               </a:rPr>
-              <a:t>between or among</a:t>
+              <a:t>between, among</a:t>
             </a:r>
             <a:endParaRPr lang="en-US" sz="850" dirty="0"/>
           </a:p>
@@ -19798,7 +19798,7 @@
                 <a:ea typeface="Calibri" pitchFamily="34" charset="-122"/>
                 <a:cs typeface="Calibri" pitchFamily="34" charset="-120"/>
               </a:rPr>
-              <a:t>in the past or having a quality</a:t>
+              <a:t>past tense, having been done</a:t>
             </a:r>
             <a:endParaRPr lang="en-US" sz="850" dirty="0"/>
           </a:p>
@@ -20671,7 +20671,7 @@
                 <a:ea typeface="Calibri" pitchFamily="34" charset="-122"/>
                 <a:cs typeface="Calibri" pitchFamily="34" charset="-120"/>
               </a:rPr>
-              <a:t>between or among</a:t>
+              <a:t>between, among</a:t>
             </a:r>
             <a:endParaRPr lang="en-US" sz="850" dirty="0"/>
           </a:p>
@@ -20895,7 +20895,7 @@
                 <a:ea typeface="Calibri" pitchFamily="34" charset="-122"/>
                 <a:cs typeface="Calibri" pitchFamily="34" charset="-120"/>
               </a:rPr>
-              <a:t>in the past or having a quality</a:t>
+              <a:t>past tense, having been done</a:t>
             </a:r>
             <a:endParaRPr lang="en-US" sz="850" dirty="0"/>
           </a:p>
@@ -21369,7 +21369,7 @@
                 <a:ea typeface="Trebuchet MS" pitchFamily="34" charset="-122"/>
                 <a:cs typeface="Trebuchet MS" pitchFamily="34" charset="-120"/>
               </a:rPr>
-              <a:t>nec</a:t>
+              <a:t>nect</a:t>
             </a:r>
             <a:endParaRPr lang="en-US" sz="1400" dirty="0"/>
           </a:p>
@@ -21474,7 +21474,7 @@
                 <a:ea typeface="Trebuchet MS" pitchFamily="34" charset="-122"/>
                 <a:cs typeface="Trebuchet MS" pitchFamily="34" charset="-120"/>
               </a:rPr>
-              <a:t>ted</a:t>
+              <a:t>ed</a:t>
             </a:r>
             <a:endParaRPr lang="en-US" sz="1400" dirty="0"/>
           </a:p>
@@ -22215,7 +22215,7 @@
                 <a:ea typeface="Calibri" pitchFamily="34" charset="-122"/>
                 <a:cs typeface="Calibri" pitchFamily="34" charset="-120"/>
               </a:rPr>
-              <a:t>between or among</a:t>
+              <a:t>between, among</a:t>
             </a:r>
             <a:endParaRPr lang="en-US" sz="850" dirty="0"/>
           </a:p>
@@ -22439,7 +22439,7 @@
                 <a:ea typeface="Calibri" pitchFamily="34" charset="-122"/>
                 <a:cs typeface="Calibri" pitchFamily="34" charset="-120"/>
               </a:rPr>
-              <a:t>in the past or having a quality</a:t>
+              <a:t>past tense, having been done</a:t>
             </a:r>
             <a:endParaRPr lang="en-US" sz="850" dirty="0"/>
           </a:p>
@@ -22913,7 +22913,7 @@
                 <a:ea typeface="Trebuchet MS" pitchFamily="34" charset="-122"/>
                 <a:cs typeface="Trebuchet MS" pitchFamily="34" charset="-120"/>
               </a:rPr>
-              <a:t>nec</a:t>
+              <a:t>nect</a:t>
             </a:r>
             <a:endParaRPr lang="en-US" sz="1400" dirty="0"/>
           </a:p>
@@ -23018,7 +23018,7 @@
                 <a:ea typeface="Trebuchet MS" pitchFamily="34" charset="-122"/>
                 <a:cs typeface="Trebuchet MS" pitchFamily="34" charset="-120"/>
               </a:rPr>
-              <a:t>ted</a:t>
+              <a:t>ed</a:t>
             </a:r>
             <a:endParaRPr lang="en-US" sz="1400" dirty="0"/>
           </a:p>
@@ -23125,8 +23125,8 @@
         </p:nvSpPr>
         <p:spPr>
           <a:xfrm>
-            <a:off x="1952897" y="4169664"/>
-            <a:ext cx="451573" cy="384048"/>
+            <a:off x="1952244" y="4169664"/>
+            <a:ext cx="543652" cy="384048"/>
           </a:xfrm>
           <a:prstGeom prst="rect">
             <a:avLst>
@@ -23152,8 +23152,8 @@
         </p:nvSpPr>
         <p:spPr>
           <a:xfrm>
-            <a:off x="1952897" y="4169664"/>
-            <a:ext cx="451573" cy="384048"/>
+            <a:off x="1952244" y="4169664"/>
+            <a:ext cx="543652" cy="384048"/>
           </a:xfrm>
           <a:prstGeom prst="rect">
             <a:avLst/>
@@ -23191,8 +23191,8 @@
         </p:nvSpPr>
         <p:spPr>
           <a:xfrm>
-            <a:off x="2455415" y="4169664"/>
-            <a:ext cx="451573" cy="384048"/>
+            <a:off x="2546188" y="4169664"/>
+            <a:ext cx="543652" cy="384048"/>
           </a:xfrm>
           <a:prstGeom prst="rect">
             <a:avLst>
@@ -23218,8 +23218,8 @@
         </p:nvSpPr>
         <p:spPr>
           <a:xfrm>
-            <a:off x="2455415" y="4169664"/>
-            <a:ext cx="451573" cy="384048"/>
+            <a:off x="2546188" y="4169664"/>
+            <a:ext cx="543652" cy="384048"/>
           </a:xfrm>
           <a:prstGeom prst="rect">
             <a:avLst/>
@@ -23257,8 +23257,8 @@
         </p:nvSpPr>
         <p:spPr>
           <a:xfrm>
-            <a:off x="2957933" y="4169664"/>
-            <a:ext cx="451573" cy="384048"/>
+            <a:off x="3140133" y="4169664"/>
+            <a:ext cx="543652" cy="384048"/>
           </a:xfrm>
           <a:prstGeom prst="rect">
             <a:avLst>
@@ -23284,8 +23284,8 @@
         </p:nvSpPr>
         <p:spPr>
           <a:xfrm>
-            <a:off x="2957933" y="4169664"/>
-            <a:ext cx="451573" cy="384048"/>
+            <a:off x="3140133" y="4169664"/>
+            <a:ext cx="543652" cy="384048"/>
           </a:xfrm>
           <a:prstGeom prst="rect">
             <a:avLst/>
@@ -23323,8 +23323,8 @@
         </p:nvSpPr>
         <p:spPr>
           <a:xfrm>
-            <a:off x="3460451" y="4169664"/>
-            <a:ext cx="451573" cy="384048"/>
+            <a:off x="3734077" y="4169664"/>
+            <a:ext cx="543652" cy="384048"/>
           </a:xfrm>
           <a:prstGeom prst="rect">
             <a:avLst>
@@ -23350,8 +23350,8 @@
         </p:nvSpPr>
         <p:spPr>
           <a:xfrm>
-            <a:off x="3460451" y="4169664"/>
-            <a:ext cx="451573" cy="384048"/>
+            <a:off x="3734077" y="4169664"/>
+            <a:ext cx="543652" cy="384048"/>
           </a:xfrm>
           <a:prstGeom prst="rect">
             <a:avLst/>
@@ -23375,7 +23375,7 @@
                 <a:ea typeface="Trebuchet MS" pitchFamily="34" charset="-122"/>
                 <a:cs typeface="Trebuchet MS" pitchFamily="34" charset="-120"/>
               </a:rPr>
-              <a:t>e</a:t>
+              <a:t>er</a:t>
             </a:r>
             <a:endParaRPr lang="en-US" sz="900" dirty="0"/>
           </a:p>
@@ -23389,8 +23389,8 @@
         </p:nvSpPr>
         <p:spPr>
           <a:xfrm>
-            <a:off x="3962969" y="4169664"/>
-            <a:ext cx="451573" cy="384048"/>
+            <a:off x="4328021" y="4169664"/>
+            <a:ext cx="543652" cy="384048"/>
           </a:xfrm>
           <a:prstGeom prst="rect">
             <a:avLst>
@@ -23416,8 +23416,8 @@
         </p:nvSpPr>
         <p:spPr>
           <a:xfrm>
-            <a:off x="3962969" y="4169664"/>
-            <a:ext cx="451573" cy="384048"/>
+            <a:off x="4328021" y="4169664"/>
+            <a:ext cx="543652" cy="384048"/>
           </a:xfrm>
           <a:prstGeom prst="rect">
             <a:avLst/>
@@ -23441,7 +23441,7 @@
                 <a:ea typeface="Trebuchet MS" pitchFamily="34" charset="-122"/>
                 <a:cs typeface="Trebuchet MS" pitchFamily="34" charset="-120"/>
               </a:rPr>
-              <a:t>r</a:t>
+              <a:t>c</a:t>
             </a:r>
             <a:endParaRPr lang="en-US" sz="900" dirty="0"/>
           </a:p>
@@ -23449,14 +23449,53 @@
       </p:sp>
       <p:sp>
         <p:nvSpPr>
-          <p:cNvPr id="55" name="Shape 53"/>
-          <p:cNvSpPr/>
-          <p:nvPr/>
-        </p:nvSpPr>
-        <p:spPr>
-          <a:xfrm>
-            <a:off x="4465487" y="4169664"/>
-            <a:ext cx="451573" cy="384048"/>
+          <p:cNvPr id="55" name="Text 53"/>
+          <p:cNvSpPr/>
+          <p:nvPr/>
+        </p:nvSpPr>
+        <p:spPr>
+          <a:xfrm>
+            <a:off x="4328021" y="4572000"/>
+            <a:ext cx="543652" cy="219456"/>
+          </a:xfrm>
+          <a:prstGeom prst="rect">
+            <a:avLst/>
+          </a:prstGeom>
+          <a:noFill/>
+          <a:ln/>
+        </p:spPr>
+        <p:txBody>
+          <a:bodyPr wrap="square" lIns="0" tIns="0" rIns="0" bIns="0" rtlCol="0" anchor="t"/>
+          <a:lstStyle/>
+          <a:p>
+            <a:pPr algn="ctr" indent="0" marL="0">
+              <a:buNone/>
+            </a:pPr>
+            <a:r>
+              <a:rPr lang="en-US" sz="750" i="1" dirty="0">
+                <a:solidFill>
+                  <a:srgbClr val="94A3B8"/>
+                </a:solidFill>
+                <a:latin typeface="Calibri" pitchFamily="34" charset="0"/>
+                <a:ea typeface="Calibri" pitchFamily="34" charset="-122"/>
+                <a:cs typeface="Calibri" pitchFamily="34" charset="-120"/>
+              </a:rPr>
+              <a:t>/k/</a:t>
+            </a:r>
+            <a:endParaRPr lang="en-US" sz="750" dirty="0"/>
+          </a:p>
+        </p:txBody>
+      </p:sp>
+      <p:sp>
+        <p:nvSpPr>
+          <p:cNvPr id="56" name="Shape 54"/>
+          <p:cNvSpPr/>
+          <p:nvPr/>
+        </p:nvSpPr>
+        <p:spPr>
+          <a:xfrm>
+            <a:off x="4921966" y="4169664"/>
+            <a:ext cx="543652" cy="384048"/>
           </a:xfrm>
           <a:prstGeom prst="rect">
             <a:avLst>
@@ -23476,14 +23515,14 @@
       </p:sp>
       <p:sp>
         <p:nvSpPr>
-          <p:cNvPr id="56" name="Text 54"/>
-          <p:cNvSpPr/>
-          <p:nvPr/>
-        </p:nvSpPr>
-        <p:spPr>
-          <a:xfrm>
-            <a:off x="4465487" y="4169664"/>
-            <a:ext cx="451573" cy="384048"/>
+          <p:cNvPr id="57" name="Text 55"/>
+          <p:cNvSpPr/>
+          <p:nvPr/>
+        </p:nvSpPr>
+        <p:spPr>
+          <a:xfrm>
+            <a:off x="4921966" y="4169664"/>
+            <a:ext cx="543652" cy="384048"/>
           </a:xfrm>
           <a:prstGeom prst="rect">
             <a:avLst/>
@@ -23507,7 +23546,7 @@
                 <a:ea typeface="Trebuchet MS" pitchFamily="34" charset="-122"/>
                 <a:cs typeface="Trebuchet MS" pitchFamily="34" charset="-120"/>
               </a:rPr>
-              <a:t>c</a:t>
+              <a:t>o</a:t>
             </a:r>
             <a:endParaRPr lang="en-US" sz="900" dirty="0"/>
           </a:p>
@@ -23515,14 +23554,212 @@
       </p:sp>
       <p:sp>
         <p:nvSpPr>
-          <p:cNvPr id="57" name="Text 55"/>
-          <p:cNvSpPr/>
-          <p:nvPr/>
-        </p:nvSpPr>
-        <p:spPr>
-          <a:xfrm>
-            <a:off x="4465487" y="4572000"/>
-            <a:ext cx="451573" cy="219456"/>
+          <p:cNvPr id="58" name="Shape 56"/>
+          <p:cNvSpPr/>
+          <p:nvPr/>
+        </p:nvSpPr>
+        <p:spPr>
+          <a:xfrm>
+            <a:off x="5515910" y="4169664"/>
+            <a:ext cx="543652" cy="384048"/>
+          </a:xfrm>
+          <a:prstGeom prst="rect">
+            <a:avLst>
+              <a:gd name="adj" fmla="val 9524"/>
+            </a:avLst>
+          </a:prstGeom>
+          <a:solidFill>
+            <a:srgbClr val="FFFFFF"/>
+          </a:solidFill>
+          <a:ln w="12700">
+            <a:solidFill>
+              <a:srgbClr val="DB2777"/>
+            </a:solidFill>
+            <a:prstDash val="solid"/>
+          </a:ln>
+        </p:spPr>
+      </p:sp>
+      <p:sp>
+        <p:nvSpPr>
+          <p:cNvPr id="59" name="Text 57"/>
+          <p:cNvSpPr/>
+          <p:nvPr/>
+        </p:nvSpPr>
+        <p:spPr>
+          <a:xfrm>
+            <a:off x="5515910" y="4169664"/>
+            <a:ext cx="543652" cy="384048"/>
+          </a:xfrm>
+          <a:prstGeom prst="rect">
+            <a:avLst/>
+          </a:prstGeom>
+          <a:noFill/>
+          <a:ln/>
+        </p:spPr>
+        <p:txBody>
+          <a:bodyPr wrap="square" lIns="0" tIns="0" rIns="0" bIns="0" rtlCol="0" anchor="ctr"/>
+          <a:lstStyle/>
+          <a:p>
+            <a:pPr algn="ctr" indent="0" marL="0">
+              <a:buNone/>
+            </a:pPr>
+            <a:r>
+              <a:rPr lang="en-US" sz="900" b="1" dirty="0">
+                <a:solidFill>
+                  <a:srgbClr val="9D174D"/>
+                </a:solidFill>
+                <a:latin typeface="Trebuchet MS" pitchFamily="34" charset="0"/>
+                <a:ea typeface="Trebuchet MS" pitchFamily="34" charset="-122"/>
+                <a:cs typeface="Trebuchet MS" pitchFamily="34" charset="-120"/>
+              </a:rPr>
+              <a:t>nn</a:t>
+            </a:r>
+            <a:endParaRPr lang="en-US" sz="900" dirty="0"/>
+          </a:p>
+        </p:txBody>
+      </p:sp>
+      <p:sp>
+        <p:nvSpPr>
+          <p:cNvPr id="60" name="Shape 58"/>
+          <p:cNvSpPr/>
+          <p:nvPr/>
+        </p:nvSpPr>
+        <p:spPr>
+          <a:xfrm>
+            <a:off x="6109855" y="4169664"/>
+            <a:ext cx="543652" cy="384048"/>
+          </a:xfrm>
+          <a:prstGeom prst="rect">
+            <a:avLst>
+              <a:gd name="adj" fmla="val 9524"/>
+            </a:avLst>
+          </a:prstGeom>
+          <a:solidFill>
+            <a:srgbClr val="FFFFFF"/>
+          </a:solidFill>
+          <a:ln w="12700">
+            <a:solidFill>
+              <a:srgbClr val="DB2777"/>
+            </a:solidFill>
+            <a:prstDash val="solid"/>
+          </a:ln>
+        </p:spPr>
+      </p:sp>
+      <p:sp>
+        <p:nvSpPr>
+          <p:cNvPr id="61" name="Text 59"/>
+          <p:cNvSpPr/>
+          <p:nvPr/>
+        </p:nvSpPr>
+        <p:spPr>
+          <a:xfrm>
+            <a:off x="6109855" y="4169664"/>
+            <a:ext cx="543652" cy="384048"/>
+          </a:xfrm>
+          <a:prstGeom prst="rect">
+            <a:avLst/>
+          </a:prstGeom>
+          <a:noFill/>
+          <a:ln/>
+        </p:spPr>
+        <p:txBody>
+          <a:bodyPr wrap="square" lIns="0" tIns="0" rIns="0" bIns="0" rtlCol="0" anchor="ctr"/>
+          <a:lstStyle/>
+          <a:p>
+            <a:pPr algn="ctr" indent="0" marL="0">
+              <a:buNone/>
+            </a:pPr>
+            <a:r>
+              <a:rPr lang="en-US" sz="900" b="1" dirty="0">
+                <a:solidFill>
+                  <a:srgbClr val="9D174D"/>
+                </a:solidFill>
+                <a:latin typeface="Trebuchet MS" pitchFamily="34" charset="0"/>
+                <a:ea typeface="Trebuchet MS" pitchFamily="34" charset="-122"/>
+                <a:cs typeface="Trebuchet MS" pitchFamily="34" charset="-120"/>
+              </a:rPr>
+              <a:t>e</a:t>
+            </a:r>
+            <a:endParaRPr lang="en-US" sz="900" dirty="0"/>
+          </a:p>
+        </p:txBody>
+      </p:sp>
+      <p:sp>
+        <p:nvSpPr>
+          <p:cNvPr id="62" name="Shape 60"/>
+          <p:cNvSpPr/>
+          <p:nvPr/>
+        </p:nvSpPr>
+        <p:spPr>
+          <a:xfrm>
+            <a:off x="6703799" y="4169664"/>
+            <a:ext cx="543652" cy="384048"/>
+          </a:xfrm>
+          <a:prstGeom prst="rect">
+            <a:avLst>
+              <a:gd name="adj" fmla="val 9524"/>
+            </a:avLst>
+          </a:prstGeom>
+          <a:solidFill>
+            <a:srgbClr val="FFFFFF"/>
+          </a:solidFill>
+          <a:ln w="12700">
+            <a:solidFill>
+              <a:srgbClr val="DB2777"/>
+            </a:solidFill>
+            <a:prstDash val="solid"/>
+          </a:ln>
+        </p:spPr>
+      </p:sp>
+      <p:sp>
+        <p:nvSpPr>
+          <p:cNvPr id="63" name="Text 61"/>
+          <p:cNvSpPr/>
+          <p:nvPr/>
+        </p:nvSpPr>
+        <p:spPr>
+          <a:xfrm>
+            <a:off x="6703799" y="4169664"/>
+            <a:ext cx="543652" cy="384048"/>
+          </a:xfrm>
+          <a:prstGeom prst="rect">
+            <a:avLst/>
+          </a:prstGeom>
+          <a:noFill/>
+          <a:ln/>
+        </p:spPr>
+        <p:txBody>
+          <a:bodyPr wrap="square" lIns="0" tIns="0" rIns="0" bIns="0" rtlCol="0" anchor="ctr"/>
+          <a:lstStyle/>
+          <a:p>
+            <a:pPr algn="ctr" indent="0" marL="0">
+              <a:buNone/>
+            </a:pPr>
+            <a:r>
+              <a:rPr lang="en-US" sz="900" b="1" dirty="0">
+                <a:solidFill>
+                  <a:srgbClr val="9D174D"/>
+                </a:solidFill>
+                <a:latin typeface="Trebuchet MS" pitchFamily="34" charset="0"/>
+                <a:ea typeface="Trebuchet MS" pitchFamily="34" charset="-122"/>
+                <a:cs typeface="Trebuchet MS" pitchFamily="34" charset="-120"/>
+              </a:rPr>
+              <a:t>ct</a:t>
+            </a:r>
+            <a:endParaRPr lang="en-US" sz="900" dirty="0"/>
+          </a:p>
+        </p:txBody>
+      </p:sp>
+      <p:sp>
+        <p:nvSpPr>
+          <p:cNvPr id="64" name="Text 62"/>
+          <p:cNvSpPr/>
+          <p:nvPr/>
+        </p:nvSpPr>
+        <p:spPr>
+          <a:xfrm>
+            <a:off x="6703799" y="4572000"/>
+            <a:ext cx="543652" cy="219456"/>
           </a:xfrm>
           <a:prstGeom prst="rect">
             <a:avLst/>
@@ -23546,7 +23783,7 @@
                 <a:ea typeface="Calibri" pitchFamily="34" charset="-122"/>
                 <a:cs typeface="Calibri" pitchFamily="34" charset="-120"/>
               </a:rPr>
-              <a:t>/k/</a:t>
+              <a:t>/kt/</a:t>
             </a:r>
             <a:endParaRPr lang="en-US" sz="750" dirty="0"/>
           </a:p>
@@ -23554,14 +23791,14 @@
       </p:sp>
       <p:sp>
         <p:nvSpPr>
-          <p:cNvPr id="58" name="Shape 56"/>
-          <p:cNvSpPr/>
-          <p:nvPr/>
-        </p:nvSpPr>
-        <p:spPr>
-          <a:xfrm>
-            <a:off x="4968006" y="4169664"/>
-            <a:ext cx="451573" cy="384048"/>
+          <p:cNvPr id="65" name="Shape 63"/>
+          <p:cNvSpPr/>
+          <p:nvPr/>
+        </p:nvSpPr>
+        <p:spPr>
+          <a:xfrm>
+            <a:off x="7297743" y="4169664"/>
+            <a:ext cx="543652" cy="384048"/>
           </a:xfrm>
           <a:prstGeom prst="rect">
             <a:avLst>
@@ -23581,14 +23818,14 @@
       </p:sp>
       <p:sp>
         <p:nvSpPr>
-          <p:cNvPr id="59" name="Text 57"/>
-          <p:cNvSpPr/>
-          <p:nvPr/>
-        </p:nvSpPr>
-        <p:spPr>
-          <a:xfrm>
-            <a:off x="4968006" y="4169664"/>
-            <a:ext cx="451573" cy="384048"/>
+          <p:cNvPr id="66" name="Text 64"/>
+          <p:cNvSpPr/>
+          <p:nvPr/>
+        </p:nvSpPr>
+        <p:spPr>
+          <a:xfrm>
+            <a:off x="7297743" y="4169664"/>
+            <a:ext cx="543652" cy="384048"/>
           </a:xfrm>
           <a:prstGeom prst="rect">
             <a:avLst/>
@@ -23612,7 +23849,7 @@
                 <a:ea typeface="Trebuchet MS" pitchFamily="34" charset="-122"/>
                 <a:cs typeface="Trebuchet MS" pitchFamily="34" charset="-120"/>
               </a:rPr>
-              <a:t>o</a:t>
+              <a:t>e</a:t>
             </a:r>
             <a:endParaRPr lang="en-US" sz="900" dirty="0"/>
           </a:p>
@@ -23620,14 +23857,14 @@
       </p:sp>
       <p:sp>
         <p:nvSpPr>
-          <p:cNvPr id="60" name="Shape 58"/>
-          <p:cNvSpPr/>
-          <p:nvPr/>
-        </p:nvSpPr>
-        <p:spPr>
-          <a:xfrm>
-            <a:off x="5470524" y="4169664"/>
-            <a:ext cx="451573" cy="384048"/>
+          <p:cNvPr id="67" name="Shape 65"/>
+          <p:cNvSpPr/>
+          <p:nvPr/>
+        </p:nvSpPr>
+        <p:spPr>
+          <a:xfrm>
+            <a:off x="7891688" y="4169664"/>
+            <a:ext cx="543652" cy="384048"/>
           </a:xfrm>
           <a:prstGeom prst="rect">
             <a:avLst>
@@ -23647,344 +23884,14 @@
       </p:sp>
       <p:sp>
         <p:nvSpPr>
-          <p:cNvPr id="61" name="Text 59"/>
-          <p:cNvSpPr/>
-          <p:nvPr/>
-        </p:nvSpPr>
-        <p:spPr>
-          <a:xfrm>
-            <a:off x="5470524" y="4169664"/>
-            <a:ext cx="451573" cy="384048"/>
-          </a:xfrm>
-          <a:prstGeom prst="rect">
-            <a:avLst/>
-          </a:prstGeom>
-          <a:noFill/>
-          <a:ln/>
-        </p:spPr>
-        <p:txBody>
-          <a:bodyPr wrap="square" lIns="0" tIns="0" rIns="0" bIns="0" rtlCol="0" anchor="ctr"/>
-          <a:lstStyle/>
-          <a:p>
-            <a:pPr algn="ctr" indent="0" marL="0">
-              <a:buNone/>
-            </a:pPr>
-            <a:r>
-              <a:rPr lang="en-US" sz="900" b="1" dirty="0">
-                <a:solidFill>
-                  <a:srgbClr val="9D174D"/>
-                </a:solidFill>
-                <a:latin typeface="Trebuchet MS" pitchFamily="34" charset="0"/>
-                <a:ea typeface="Trebuchet MS" pitchFamily="34" charset="-122"/>
-                <a:cs typeface="Trebuchet MS" pitchFamily="34" charset="-120"/>
-              </a:rPr>
-              <a:t>nn</a:t>
-            </a:r>
-            <a:endParaRPr lang="en-US" sz="900" dirty="0"/>
-          </a:p>
-        </p:txBody>
-      </p:sp>
-      <p:sp>
-        <p:nvSpPr>
-          <p:cNvPr id="62" name="Shape 60"/>
-          <p:cNvSpPr/>
-          <p:nvPr/>
-        </p:nvSpPr>
-        <p:spPr>
-          <a:xfrm>
-            <a:off x="5973042" y="4169664"/>
-            <a:ext cx="451573" cy="384048"/>
-          </a:xfrm>
-          <a:prstGeom prst="rect">
-            <a:avLst>
-              <a:gd name="adj" fmla="val 9524"/>
-            </a:avLst>
-          </a:prstGeom>
-          <a:solidFill>
-            <a:srgbClr val="FFFFFF"/>
-          </a:solidFill>
-          <a:ln w="12700">
-            <a:solidFill>
-              <a:srgbClr val="DB2777"/>
-            </a:solidFill>
-            <a:prstDash val="solid"/>
-          </a:ln>
-        </p:spPr>
-      </p:sp>
-      <p:sp>
-        <p:nvSpPr>
-          <p:cNvPr id="63" name="Text 61"/>
-          <p:cNvSpPr/>
-          <p:nvPr/>
-        </p:nvSpPr>
-        <p:spPr>
-          <a:xfrm>
-            <a:off x="5973042" y="4169664"/>
-            <a:ext cx="451573" cy="384048"/>
-          </a:xfrm>
-          <a:prstGeom prst="rect">
-            <a:avLst/>
-          </a:prstGeom>
-          <a:noFill/>
-          <a:ln/>
-        </p:spPr>
-        <p:txBody>
-          <a:bodyPr wrap="square" lIns="0" tIns="0" rIns="0" bIns="0" rtlCol="0" anchor="ctr"/>
-          <a:lstStyle/>
-          <a:p>
-            <a:pPr algn="ctr" indent="0" marL="0">
-              <a:buNone/>
-            </a:pPr>
-            <a:r>
-              <a:rPr lang="en-US" sz="900" b="1" dirty="0">
-                <a:solidFill>
-                  <a:srgbClr val="9D174D"/>
-                </a:solidFill>
-                <a:latin typeface="Trebuchet MS" pitchFamily="34" charset="0"/>
-                <a:ea typeface="Trebuchet MS" pitchFamily="34" charset="-122"/>
-                <a:cs typeface="Trebuchet MS" pitchFamily="34" charset="-120"/>
-              </a:rPr>
-              <a:t>e</a:t>
-            </a:r>
-            <a:endParaRPr lang="en-US" sz="900" dirty="0"/>
-          </a:p>
-        </p:txBody>
-      </p:sp>
-      <p:sp>
-        <p:nvSpPr>
-          <p:cNvPr id="64" name="Shape 62"/>
-          <p:cNvSpPr/>
-          <p:nvPr/>
-        </p:nvSpPr>
-        <p:spPr>
-          <a:xfrm>
-            <a:off x="6475560" y="4169664"/>
-            <a:ext cx="451573" cy="384048"/>
-          </a:xfrm>
-          <a:prstGeom prst="rect">
-            <a:avLst>
-              <a:gd name="adj" fmla="val 9524"/>
-            </a:avLst>
-          </a:prstGeom>
-          <a:solidFill>
-            <a:srgbClr val="FFFFFF"/>
-          </a:solidFill>
-          <a:ln w="12700">
-            <a:solidFill>
-              <a:srgbClr val="DB2777"/>
-            </a:solidFill>
-            <a:prstDash val="solid"/>
-          </a:ln>
-        </p:spPr>
-      </p:sp>
-      <p:sp>
-        <p:nvSpPr>
-          <p:cNvPr id="65" name="Text 63"/>
-          <p:cNvSpPr/>
-          <p:nvPr/>
-        </p:nvSpPr>
-        <p:spPr>
-          <a:xfrm>
-            <a:off x="6475560" y="4169664"/>
-            <a:ext cx="451573" cy="384048"/>
-          </a:xfrm>
-          <a:prstGeom prst="rect">
-            <a:avLst/>
-          </a:prstGeom>
-          <a:noFill/>
-          <a:ln/>
-        </p:spPr>
-        <p:txBody>
-          <a:bodyPr wrap="square" lIns="0" tIns="0" rIns="0" bIns="0" rtlCol="0" anchor="ctr"/>
-          <a:lstStyle/>
-          <a:p>
-            <a:pPr algn="ctr" indent="0" marL="0">
-              <a:buNone/>
-            </a:pPr>
-            <a:r>
-              <a:rPr lang="en-US" sz="900" b="1" dirty="0">
-                <a:solidFill>
-                  <a:srgbClr val="9D174D"/>
-                </a:solidFill>
-                <a:latin typeface="Trebuchet MS" pitchFamily="34" charset="0"/>
-                <a:ea typeface="Trebuchet MS" pitchFamily="34" charset="-122"/>
-                <a:cs typeface="Trebuchet MS" pitchFamily="34" charset="-120"/>
-              </a:rPr>
-              <a:t>c</a:t>
-            </a:r>
-            <a:endParaRPr lang="en-US" sz="900" dirty="0"/>
-          </a:p>
-        </p:txBody>
-      </p:sp>
-      <p:sp>
-        <p:nvSpPr>
-          <p:cNvPr id="66" name="Shape 64"/>
-          <p:cNvSpPr/>
-          <p:nvPr/>
-        </p:nvSpPr>
-        <p:spPr>
-          <a:xfrm>
-            <a:off x="6978078" y="4169664"/>
-            <a:ext cx="451573" cy="384048"/>
-          </a:xfrm>
-          <a:prstGeom prst="rect">
-            <a:avLst>
-              <a:gd name="adj" fmla="val 9524"/>
-            </a:avLst>
-          </a:prstGeom>
-          <a:solidFill>
-            <a:srgbClr val="FFFFFF"/>
-          </a:solidFill>
-          <a:ln w="12700">
-            <a:solidFill>
-              <a:srgbClr val="DB2777"/>
-            </a:solidFill>
-            <a:prstDash val="solid"/>
-          </a:ln>
-        </p:spPr>
-      </p:sp>
-      <p:sp>
-        <p:nvSpPr>
-          <p:cNvPr id="67" name="Text 65"/>
-          <p:cNvSpPr/>
-          <p:nvPr/>
-        </p:nvSpPr>
-        <p:spPr>
-          <a:xfrm>
-            <a:off x="6978078" y="4169664"/>
-            <a:ext cx="451573" cy="384048"/>
-          </a:xfrm>
-          <a:prstGeom prst="rect">
-            <a:avLst/>
-          </a:prstGeom>
-          <a:noFill/>
-          <a:ln/>
-        </p:spPr>
-        <p:txBody>
-          <a:bodyPr wrap="square" lIns="0" tIns="0" rIns="0" bIns="0" rtlCol="0" anchor="ctr"/>
-          <a:lstStyle/>
-          <a:p>
-            <a:pPr algn="ctr" indent="0" marL="0">
-              <a:buNone/>
-            </a:pPr>
-            <a:r>
-              <a:rPr lang="en-US" sz="900" b="1" dirty="0">
-                <a:solidFill>
-                  <a:srgbClr val="9D174D"/>
-                </a:solidFill>
-                <a:latin typeface="Trebuchet MS" pitchFamily="34" charset="0"/>
-                <a:ea typeface="Trebuchet MS" pitchFamily="34" charset="-122"/>
-                <a:cs typeface="Trebuchet MS" pitchFamily="34" charset="-120"/>
-              </a:rPr>
-              <a:t>t</a:t>
-            </a:r>
-            <a:endParaRPr lang="en-US" sz="900" dirty="0"/>
-          </a:p>
-        </p:txBody>
-      </p:sp>
-      <p:sp>
-        <p:nvSpPr>
-          <p:cNvPr id="68" name="Shape 66"/>
-          <p:cNvSpPr/>
-          <p:nvPr/>
-        </p:nvSpPr>
-        <p:spPr>
-          <a:xfrm>
-            <a:off x="7480596" y="4169664"/>
-            <a:ext cx="451573" cy="384048"/>
-          </a:xfrm>
-          <a:prstGeom prst="rect">
-            <a:avLst>
-              <a:gd name="adj" fmla="val 9524"/>
-            </a:avLst>
-          </a:prstGeom>
-          <a:solidFill>
-            <a:srgbClr val="FFFFFF"/>
-          </a:solidFill>
-          <a:ln w="12700">
-            <a:solidFill>
-              <a:srgbClr val="DB2777"/>
-            </a:solidFill>
-            <a:prstDash val="solid"/>
-          </a:ln>
-        </p:spPr>
-      </p:sp>
-      <p:sp>
-        <p:nvSpPr>
-          <p:cNvPr id="69" name="Text 67"/>
-          <p:cNvSpPr/>
-          <p:nvPr/>
-        </p:nvSpPr>
-        <p:spPr>
-          <a:xfrm>
-            <a:off x="7480596" y="4169664"/>
-            <a:ext cx="451573" cy="384048"/>
-          </a:xfrm>
-          <a:prstGeom prst="rect">
-            <a:avLst/>
-          </a:prstGeom>
-          <a:noFill/>
-          <a:ln/>
-        </p:spPr>
-        <p:txBody>
-          <a:bodyPr wrap="square" lIns="0" tIns="0" rIns="0" bIns="0" rtlCol="0" anchor="ctr"/>
-          <a:lstStyle/>
-          <a:p>
-            <a:pPr algn="ctr" indent="0" marL="0">
-              <a:buNone/>
-            </a:pPr>
-            <a:r>
-              <a:rPr lang="en-US" sz="900" b="1" dirty="0">
-                <a:solidFill>
-                  <a:srgbClr val="9D174D"/>
-                </a:solidFill>
-                <a:latin typeface="Trebuchet MS" pitchFamily="34" charset="0"/>
-                <a:ea typeface="Trebuchet MS" pitchFamily="34" charset="-122"/>
-                <a:cs typeface="Trebuchet MS" pitchFamily="34" charset="-120"/>
-              </a:rPr>
-              <a:t>e</a:t>
-            </a:r>
-            <a:endParaRPr lang="en-US" sz="900" dirty="0"/>
-          </a:p>
-        </p:txBody>
-      </p:sp>
-      <p:sp>
-        <p:nvSpPr>
-          <p:cNvPr id="70" name="Shape 68"/>
-          <p:cNvSpPr/>
-          <p:nvPr/>
-        </p:nvSpPr>
-        <p:spPr>
-          <a:xfrm>
-            <a:off x="7983114" y="4169664"/>
-            <a:ext cx="451573" cy="384048"/>
-          </a:xfrm>
-          <a:prstGeom prst="rect">
-            <a:avLst>
-              <a:gd name="adj" fmla="val 9524"/>
-            </a:avLst>
-          </a:prstGeom>
-          <a:solidFill>
-            <a:srgbClr val="FFFFFF"/>
-          </a:solidFill>
-          <a:ln w="12700">
-            <a:solidFill>
-              <a:srgbClr val="DB2777"/>
-            </a:solidFill>
-            <a:prstDash val="solid"/>
-          </a:ln>
-        </p:spPr>
-      </p:sp>
-      <p:sp>
-        <p:nvSpPr>
-          <p:cNvPr id="71" name="Text 69"/>
-          <p:cNvSpPr/>
-          <p:nvPr/>
-        </p:nvSpPr>
-        <p:spPr>
-          <a:xfrm>
-            <a:off x="7983114" y="4169664"/>
-            <a:ext cx="451573" cy="384048"/>
+          <p:cNvPr id="68" name="Text 66"/>
+          <p:cNvSpPr/>
+          <p:nvPr/>
+        </p:nvSpPr>
+        <p:spPr>
+          <a:xfrm>
+            <a:off x="7891688" y="4169664"/>
+            <a:ext cx="543652" cy="384048"/>
           </a:xfrm>
           <a:prstGeom prst="rect">
             <a:avLst/>
@@ -25556,7 +25463,7 @@
                 <a:ea typeface="Calibri" pitchFamily="34" charset="-122"/>
                 <a:cs typeface="Calibri" pitchFamily="34" charset="-120"/>
               </a:rPr>
-              <a:t>action or result of</a:t>
+              <a:t>act or result of</a:t>
             </a:r>
             <a:endParaRPr lang="en-US" sz="850" dirty="0"/>
           </a:p>
@@ -25564,7 +25471,46 @@
       </p:sp>
       <p:sp>
         <p:nvSpPr>
-          <p:cNvPr id="22" name="Shape 20"/>
+          <p:cNvPr id="22" name="Text 20"/>
+          <p:cNvSpPr/>
+          <p:nvPr/>
+        </p:nvSpPr>
+        <p:spPr>
+          <a:xfrm>
+            <a:off x="5803392" y="2752344"/>
+            <a:ext cx="1828800" cy="182880"/>
+          </a:xfrm>
+          <a:prstGeom prst="rect">
+            <a:avLst/>
+          </a:prstGeom>
+          <a:noFill/>
+          <a:ln/>
+        </p:spPr>
+        <p:txBody>
+          <a:bodyPr wrap="square" lIns="0" tIns="0" rIns="0" bIns="0" rtlCol="0" anchor="t"/>
+          <a:lstStyle/>
+          <a:p>
+            <a:pPr algn="ctr" indent="0" marL="0">
+              <a:buNone/>
+            </a:pPr>
+            <a:r>
+              <a:rPr lang="en-US" sz="700" i="1" dirty="0">
+                <a:solidFill>
+                  <a:srgbClr val="94A3B8"/>
+                </a:solidFill>
+                <a:latin typeface="Calibri" pitchFamily="34" charset="0"/>
+                <a:ea typeface="Calibri" pitchFamily="34" charset="-122"/>
+                <a:cs typeface="Calibri" pitchFamily="34" charset="-120"/>
+              </a:rPr>
+              <a:t>'t' in 'ct' combines with 'ion' to make /shun/</a:t>
+            </a:r>
+            <a:endParaRPr lang="en-US" sz="700" dirty="0"/>
+          </a:p>
+        </p:txBody>
+      </p:sp>
+      <p:sp>
+        <p:nvSpPr>
+          <p:cNvPr id="23" name="Shape 21"/>
           <p:cNvSpPr/>
           <p:nvPr/>
         </p:nvSpPr>
@@ -25591,7 +25537,7 @@
       </p:sp>
       <p:sp>
         <p:nvSpPr>
-          <p:cNvPr id="23" name="Text 21"/>
+          <p:cNvPr id="24" name="Text 22"/>
           <p:cNvSpPr/>
           <p:nvPr/>
         </p:nvSpPr>
@@ -25630,7 +25576,7 @@
       </p:sp>
       <p:sp>
         <p:nvSpPr>
-          <p:cNvPr id="24" name="Shape 22"/>
+          <p:cNvPr id="25" name="Shape 23"/>
           <p:cNvSpPr/>
           <p:nvPr/>
         </p:nvSpPr>
@@ -25657,7 +25603,7 @@
       </p:sp>
       <p:sp>
         <p:nvSpPr>
-          <p:cNvPr id="25" name="Text 23"/>
+          <p:cNvPr id="26" name="Text 24"/>
           <p:cNvSpPr/>
           <p:nvPr/>
         </p:nvSpPr>
@@ -25696,7 +25642,7 @@
       </p:sp>
       <p:sp>
         <p:nvSpPr>
-          <p:cNvPr id="26" name="Shape 24"/>
+          <p:cNvPr id="27" name="Shape 25"/>
           <p:cNvSpPr/>
           <p:nvPr/>
         </p:nvSpPr>
@@ -25723,7 +25669,7 @@
       </p:sp>
       <p:sp>
         <p:nvSpPr>
-          <p:cNvPr id="27" name="Text 25"/>
+          <p:cNvPr id="28" name="Text 26"/>
           <p:cNvSpPr/>
           <p:nvPr/>
         </p:nvSpPr>
@@ -25762,7 +25708,7 @@
       </p:sp>
       <p:sp>
         <p:nvSpPr>
-          <p:cNvPr id="28" name="Shape 26"/>
+          <p:cNvPr id="29" name="Shape 27"/>
           <p:cNvSpPr/>
           <p:nvPr/>
         </p:nvSpPr>
@@ -25789,7 +25735,7 @@
       </p:sp>
       <p:sp>
         <p:nvSpPr>
-          <p:cNvPr id="29" name="Text 27"/>
+          <p:cNvPr id="30" name="Text 28"/>
           <p:cNvSpPr/>
           <p:nvPr/>
         </p:nvSpPr>
@@ -27260,7 +27206,7 @@
                 <a:ea typeface="Calibri" pitchFamily="34" charset="-122"/>
                 <a:cs typeface="Calibri" pitchFamily="34" charset="-120"/>
               </a:rPr>
-              <a:t>action or result of</a:t>
+              <a:t>act or result of</a:t>
             </a:r>
             <a:endParaRPr lang="en-US" sz="850" dirty="0"/>
           </a:p>
@@ -27268,7 +27214,46 @@
       </p:sp>
       <p:sp>
         <p:nvSpPr>
-          <p:cNvPr id="22" name="Shape 20"/>
+          <p:cNvPr id="22" name="Text 20"/>
+          <p:cNvSpPr/>
+          <p:nvPr/>
+        </p:nvSpPr>
+        <p:spPr>
+          <a:xfrm>
+            <a:off x="5803392" y="2752344"/>
+            <a:ext cx="1828800" cy="182880"/>
+          </a:xfrm>
+          <a:prstGeom prst="rect">
+            <a:avLst/>
+          </a:prstGeom>
+          <a:noFill/>
+          <a:ln/>
+        </p:spPr>
+        <p:txBody>
+          <a:bodyPr wrap="square" lIns="0" tIns="0" rIns="0" bIns="0" rtlCol="0" anchor="t"/>
+          <a:lstStyle/>
+          <a:p>
+            <a:pPr algn="ctr" indent="0" marL="0">
+              <a:buNone/>
+            </a:pPr>
+            <a:r>
+              <a:rPr lang="en-US" sz="700" i="1" dirty="0">
+                <a:solidFill>
+                  <a:srgbClr val="94A3B8"/>
+                </a:solidFill>
+                <a:latin typeface="Calibri" pitchFamily="34" charset="0"/>
+                <a:ea typeface="Calibri" pitchFamily="34" charset="-122"/>
+                <a:cs typeface="Calibri" pitchFamily="34" charset="-120"/>
+              </a:rPr>
+              <a:t>'t' in 'ct' combines with 'ion' to make /shun/</a:t>
+            </a:r>
+            <a:endParaRPr lang="en-US" sz="700" dirty="0"/>
+          </a:p>
+        </p:txBody>
+      </p:sp>
+      <p:sp>
+        <p:nvSpPr>
+          <p:cNvPr id="23" name="Shape 21"/>
           <p:cNvSpPr/>
           <p:nvPr/>
         </p:nvSpPr>
@@ -27295,7 +27280,7 @@
       </p:sp>
       <p:sp>
         <p:nvSpPr>
-          <p:cNvPr id="23" name="Text 21"/>
+          <p:cNvPr id="24" name="Text 22"/>
           <p:cNvSpPr/>
           <p:nvPr/>
         </p:nvSpPr>
@@ -27334,7 +27319,7 @@
       </p:sp>
       <p:sp>
         <p:nvSpPr>
-          <p:cNvPr id="24" name="Shape 22"/>
+          <p:cNvPr id="25" name="Shape 23"/>
           <p:cNvSpPr/>
           <p:nvPr/>
         </p:nvSpPr>
@@ -27361,7 +27346,7 @@
       </p:sp>
       <p:sp>
         <p:nvSpPr>
-          <p:cNvPr id="25" name="Shape 23"/>
+          <p:cNvPr id="26" name="Shape 24"/>
           <p:cNvSpPr/>
           <p:nvPr/>
         </p:nvSpPr>
@@ -27388,7 +27373,7 @@
       </p:sp>
       <p:sp>
         <p:nvSpPr>
-          <p:cNvPr id="26" name="Text 24"/>
+          <p:cNvPr id="27" name="Text 25"/>
           <p:cNvSpPr/>
           <p:nvPr/>
         </p:nvSpPr>
@@ -27427,7 +27412,7 @@
       </p:sp>
       <p:sp>
         <p:nvSpPr>
-          <p:cNvPr id="27" name="Text 25"/>
+          <p:cNvPr id="28" name="Text 26"/>
           <p:cNvSpPr/>
           <p:nvPr/>
         </p:nvSpPr>
@@ -27466,7 +27451,7 @@
       </p:sp>
       <p:sp>
         <p:nvSpPr>
-          <p:cNvPr id="28" name="Shape 26"/>
+          <p:cNvPr id="29" name="Shape 27"/>
           <p:cNvSpPr/>
           <p:nvPr/>
         </p:nvSpPr>
@@ -27493,7 +27478,7 @@
       </p:sp>
       <p:sp>
         <p:nvSpPr>
-          <p:cNvPr id="29" name="Text 27"/>
+          <p:cNvPr id="30" name="Text 28"/>
           <p:cNvSpPr/>
           <p:nvPr/>
         </p:nvSpPr>
@@ -27532,7 +27517,7 @@
       </p:sp>
       <p:sp>
         <p:nvSpPr>
-          <p:cNvPr id="30" name="Text 28"/>
+          <p:cNvPr id="31" name="Text 29"/>
           <p:cNvSpPr/>
           <p:nvPr/>
         </p:nvSpPr>
@@ -27571,7 +27556,7 @@
       </p:sp>
       <p:sp>
         <p:nvSpPr>
-          <p:cNvPr id="31" name="Shape 29"/>
+          <p:cNvPr id="32" name="Shape 30"/>
           <p:cNvSpPr/>
           <p:nvPr/>
         </p:nvSpPr>
@@ -27598,7 +27583,7 @@
       </p:sp>
       <p:sp>
         <p:nvSpPr>
-          <p:cNvPr id="32" name="Text 30"/>
+          <p:cNvPr id="33" name="Text 31"/>
           <p:cNvSpPr/>
           <p:nvPr/>
         </p:nvSpPr>
@@ -27637,7 +27622,7 @@
       </p:sp>
       <p:sp>
         <p:nvSpPr>
-          <p:cNvPr id="33" name="Shape 31"/>
+          <p:cNvPr id="34" name="Shape 32"/>
           <p:cNvSpPr/>
           <p:nvPr/>
         </p:nvSpPr>
@@ -27664,7 +27649,7 @@
       </p:sp>
       <p:sp>
         <p:nvSpPr>
-          <p:cNvPr id="34" name="Text 32"/>
+          <p:cNvPr id="35" name="Text 33"/>
           <p:cNvSpPr/>
           <p:nvPr/>
         </p:nvSpPr>
@@ -27703,7 +27688,7 @@
       </p:sp>
       <p:sp>
         <p:nvSpPr>
-          <p:cNvPr id="35" name="Shape 33"/>
+          <p:cNvPr id="36" name="Shape 34"/>
           <p:cNvSpPr/>
           <p:nvPr/>
         </p:nvSpPr>
@@ -27730,7 +27715,7 @@
       </p:sp>
       <p:sp>
         <p:nvSpPr>
-          <p:cNvPr id="36" name="Text 34"/>
+          <p:cNvPr id="37" name="Text 35"/>
           <p:cNvSpPr/>
           <p:nvPr/>
         </p:nvSpPr>
@@ -28482,7 +28467,7 @@
                 <a:ea typeface="Calibri" pitchFamily="34" charset="-122"/>
                 <a:cs typeface="Calibri" pitchFamily="34" charset="-120"/>
               </a:rPr>
-              <a:t>action or result of</a:t>
+              <a:t>act or result of</a:t>
             </a:r>
             <a:endParaRPr lang="en-US" sz="850" dirty="0"/>
           </a:p>
@@ -28490,7 +28475,46 @@
       </p:sp>
       <p:sp>
         <p:nvSpPr>
-          <p:cNvPr id="22" name="Shape 20"/>
+          <p:cNvPr id="22" name="Text 20"/>
+          <p:cNvSpPr/>
+          <p:nvPr/>
+        </p:nvSpPr>
+        <p:spPr>
+          <a:xfrm>
+            <a:off x="5803392" y="2752344"/>
+            <a:ext cx="1828800" cy="182880"/>
+          </a:xfrm>
+          <a:prstGeom prst="rect">
+            <a:avLst/>
+          </a:prstGeom>
+          <a:noFill/>
+          <a:ln/>
+        </p:spPr>
+        <p:txBody>
+          <a:bodyPr wrap="square" lIns="0" tIns="0" rIns="0" bIns="0" rtlCol="0" anchor="t"/>
+          <a:lstStyle/>
+          <a:p>
+            <a:pPr algn="ctr" indent="0" marL="0">
+              <a:buNone/>
+            </a:pPr>
+            <a:r>
+              <a:rPr lang="en-US" sz="700" i="1" dirty="0">
+                <a:solidFill>
+                  <a:srgbClr val="94A3B8"/>
+                </a:solidFill>
+                <a:latin typeface="Calibri" pitchFamily="34" charset="0"/>
+                <a:ea typeface="Calibri" pitchFamily="34" charset="-122"/>
+                <a:cs typeface="Calibri" pitchFamily="34" charset="-120"/>
+              </a:rPr>
+              <a:t>'t' in 'ct' combines with 'ion' to make /shun/</a:t>
+            </a:r>
+            <a:endParaRPr lang="en-US" sz="700" dirty="0"/>
+          </a:p>
+        </p:txBody>
+      </p:sp>
+      <p:sp>
+        <p:nvSpPr>
+          <p:cNvPr id="23" name="Shape 21"/>
           <p:cNvSpPr/>
           <p:nvPr/>
         </p:nvSpPr>
@@ -28517,7 +28541,7 @@
       </p:sp>
       <p:sp>
         <p:nvSpPr>
-          <p:cNvPr id="23" name="Text 21"/>
+          <p:cNvPr id="24" name="Text 22"/>
           <p:cNvSpPr/>
           <p:nvPr/>
         </p:nvSpPr>
@@ -28556,7 +28580,7 @@
       </p:sp>
       <p:sp>
         <p:nvSpPr>
-          <p:cNvPr id="24" name="Shape 22"/>
+          <p:cNvPr id="25" name="Shape 23"/>
           <p:cNvSpPr/>
           <p:nvPr/>
         </p:nvSpPr>
@@ -28583,7 +28607,7 @@
       </p:sp>
       <p:sp>
         <p:nvSpPr>
-          <p:cNvPr id="25" name="Shape 23"/>
+          <p:cNvPr id="26" name="Shape 24"/>
           <p:cNvSpPr/>
           <p:nvPr/>
         </p:nvSpPr>
@@ -28610,7 +28634,7 @@
       </p:sp>
       <p:sp>
         <p:nvSpPr>
-          <p:cNvPr id="26" name="Text 24"/>
+          <p:cNvPr id="27" name="Text 25"/>
           <p:cNvSpPr/>
           <p:nvPr/>
         </p:nvSpPr>
@@ -28649,7 +28673,7 @@
       </p:sp>
       <p:sp>
         <p:nvSpPr>
-          <p:cNvPr id="27" name="Text 25"/>
+          <p:cNvPr id="28" name="Text 26"/>
           <p:cNvSpPr/>
           <p:nvPr/>
         </p:nvSpPr>
@@ -28688,7 +28712,7 @@
       </p:sp>
       <p:sp>
         <p:nvSpPr>
-          <p:cNvPr id="28" name="Shape 26"/>
+          <p:cNvPr id="29" name="Shape 27"/>
           <p:cNvSpPr/>
           <p:nvPr/>
         </p:nvSpPr>
@@ -28715,7 +28739,7 @@
       </p:sp>
       <p:sp>
         <p:nvSpPr>
-          <p:cNvPr id="29" name="Text 27"/>
+          <p:cNvPr id="30" name="Text 28"/>
           <p:cNvSpPr/>
           <p:nvPr/>
         </p:nvSpPr>
@@ -28754,7 +28778,7 @@
       </p:sp>
       <p:sp>
         <p:nvSpPr>
-          <p:cNvPr id="30" name="Text 28"/>
+          <p:cNvPr id="31" name="Text 29"/>
           <p:cNvSpPr/>
           <p:nvPr/>
         </p:nvSpPr>
@@ -28793,7 +28817,7 @@
       </p:sp>
       <p:sp>
         <p:nvSpPr>
-          <p:cNvPr id="31" name="Shape 29"/>
+          <p:cNvPr id="32" name="Shape 30"/>
           <p:cNvSpPr/>
           <p:nvPr/>
         </p:nvSpPr>
@@ -28820,7 +28844,7 @@
       </p:sp>
       <p:sp>
         <p:nvSpPr>
-          <p:cNvPr id="32" name="Text 30"/>
+          <p:cNvPr id="33" name="Text 31"/>
           <p:cNvSpPr/>
           <p:nvPr/>
         </p:nvSpPr>
@@ -28859,7 +28883,7 @@
       </p:sp>
       <p:sp>
         <p:nvSpPr>
-          <p:cNvPr id="33" name="Shape 31"/>
+          <p:cNvPr id="34" name="Shape 32"/>
           <p:cNvSpPr/>
           <p:nvPr/>
         </p:nvSpPr>
@@ -28886,7 +28910,7 @@
       </p:sp>
       <p:sp>
         <p:nvSpPr>
-          <p:cNvPr id="34" name="Text 32"/>
+          <p:cNvPr id="35" name="Text 33"/>
           <p:cNvSpPr/>
           <p:nvPr/>
         </p:nvSpPr>
@@ -28925,7 +28949,7 @@
       </p:sp>
       <p:sp>
         <p:nvSpPr>
-          <p:cNvPr id="35" name="Shape 33"/>
+          <p:cNvPr id="36" name="Shape 34"/>
           <p:cNvSpPr/>
           <p:nvPr/>
         </p:nvSpPr>
@@ -28952,7 +28976,7 @@
       </p:sp>
       <p:sp>
         <p:nvSpPr>
-          <p:cNvPr id="36" name="Shape 34"/>
+          <p:cNvPr id="37" name="Shape 35"/>
           <p:cNvSpPr/>
           <p:nvPr/>
         </p:nvSpPr>
@@ -28979,7 +29003,7 @@
       </p:sp>
       <p:sp>
         <p:nvSpPr>
-          <p:cNvPr id="37" name="Text 35"/>
+          <p:cNvPr id="38" name="Text 36"/>
           <p:cNvSpPr/>
           <p:nvPr/>
         </p:nvSpPr>
@@ -29018,7 +29042,7 @@
       </p:sp>
       <p:sp>
         <p:nvSpPr>
-          <p:cNvPr id="38" name="Text 36"/>
+          <p:cNvPr id="39" name="Text 37"/>
           <p:cNvSpPr/>
           <p:nvPr/>
         </p:nvSpPr>
@@ -29057,7 +29081,7 @@
       </p:sp>
       <p:sp>
         <p:nvSpPr>
-          <p:cNvPr id="39" name="Shape 37"/>
+          <p:cNvPr id="40" name="Shape 38"/>
           <p:cNvSpPr/>
           <p:nvPr/>
         </p:nvSpPr>
@@ -29084,7 +29108,7 @@
       </p:sp>
       <p:sp>
         <p:nvSpPr>
-          <p:cNvPr id="40" name="Text 38"/>
+          <p:cNvPr id="41" name="Text 39"/>
           <p:cNvSpPr/>
           <p:nvPr/>
         </p:nvSpPr>
@@ -29123,7 +29147,7 @@
       </p:sp>
       <p:sp>
         <p:nvSpPr>
-          <p:cNvPr id="41" name="Shape 39"/>
+          <p:cNvPr id="42" name="Shape 40"/>
           <p:cNvSpPr/>
           <p:nvPr/>
         </p:nvSpPr>
@@ -29150,7 +29174,7 @@
       </p:sp>
       <p:sp>
         <p:nvSpPr>
-          <p:cNvPr id="42" name="Text 40"/>
+          <p:cNvPr id="43" name="Text 41"/>
           <p:cNvSpPr/>
           <p:nvPr/>
         </p:nvSpPr>
@@ -29189,7 +29213,7 @@
       </p:sp>
       <p:sp>
         <p:nvSpPr>
-          <p:cNvPr id="43" name="Shape 41"/>
+          <p:cNvPr id="44" name="Shape 42"/>
           <p:cNvSpPr/>
           <p:nvPr/>
         </p:nvSpPr>
@@ -29216,7 +29240,7 @@
       </p:sp>
       <p:sp>
         <p:nvSpPr>
-          <p:cNvPr id="44" name="Text 42"/>
+          <p:cNvPr id="45" name="Text 43"/>
           <p:cNvSpPr/>
           <p:nvPr/>
         </p:nvSpPr>
@@ -29255,7 +29279,7 @@
       </p:sp>
       <p:sp>
         <p:nvSpPr>
-          <p:cNvPr id="45" name="Shape 43"/>
+          <p:cNvPr id="46" name="Shape 44"/>
           <p:cNvSpPr/>
           <p:nvPr/>
         </p:nvSpPr>
@@ -29282,7 +29306,7 @@
       </p:sp>
       <p:sp>
         <p:nvSpPr>
-          <p:cNvPr id="46" name="Text 44"/>
+          <p:cNvPr id="47" name="Text 45"/>
           <p:cNvSpPr/>
           <p:nvPr/>
         </p:nvSpPr>
@@ -29321,7 +29345,46 @@
       </p:sp>
       <p:sp>
         <p:nvSpPr>
-          <p:cNvPr id="47" name="Shape 45"/>
+          <p:cNvPr id="48" name="Text 46"/>
+          <p:cNvSpPr/>
+          <p:nvPr/>
+        </p:nvSpPr>
+        <p:spPr>
+          <a:xfrm>
+            <a:off x="5254752" y="4572000"/>
+            <a:ext cx="685800" cy="219456"/>
+          </a:xfrm>
+          <a:prstGeom prst="rect">
+            <a:avLst/>
+          </a:prstGeom>
+          <a:noFill/>
+          <a:ln/>
+        </p:spPr>
+        <p:txBody>
+          <a:bodyPr wrap="square" lIns="0" tIns="0" rIns="0" bIns="0" rtlCol="0" anchor="t"/>
+          <a:lstStyle/>
+          <a:p>
+            <a:pPr algn="ctr" indent="0" marL="0">
+              <a:buNone/>
+            </a:pPr>
+            <a:r>
+              <a:rPr lang="en-US" sz="750" i="1" dirty="0">
+                <a:solidFill>
+                  <a:srgbClr val="94A3B8"/>
+                </a:solidFill>
+                <a:latin typeface="Calibri" pitchFamily="34" charset="0"/>
+                <a:ea typeface="Calibri" pitchFamily="34" charset="-122"/>
+                <a:cs typeface="Calibri" pitchFamily="34" charset="-120"/>
+              </a:rPr>
+              <a:t>/k/</a:t>
+            </a:r>
+            <a:endParaRPr lang="en-US" sz="750" dirty="0"/>
+          </a:p>
+        </p:txBody>
+      </p:sp>
+      <p:sp>
+        <p:nvSpPr>
+          <p:cNvPr id="49" name="Shape 47"/>
           <p:cNvSpPr/>
           <p:nvPr/>
         </p:nvSpPr>
@@ -29348,7 +29411,7 @@
       </p:sp>
       <p:sp>
         <p:nvSpPr>
-          <p:cNvPr id="48" name="Text 46"/>
+          <p:cNvPr id="50" name="Text 48"/>
           <p:cNvSpPr/>
           <p:nvPr/>
         </p:nvSpPr>
@@ -29387,7 +29450,7 @@
       </p:sp>
       <p:sp>
         <p:nvSpPr>
-          <p:cNvPr id="49" name="Text 47"/>
+          <p:cNvPr id="51" name="Text 49"/>
           <p:cNvSpPr/>
           <p:nvPr/>
         </p:nvSpPr>
@@ -29426,7 +29489,7 @@
       </p:sp>
       <p:sp>
         <p:nvSpPr>
-          <p:cNvPr id="50" name="Shape 48"/>
+          <p:cNvPr id="52" name="Shape 50"/>
           <p:cNvSpPr/>
           <p:nvPr/>
         </p:nvSpPr>
@@ -29453,7 +29516,7 @@
       </p:sp>
       <p:sp>
         <p:nvSpPr>
-          <p:cNvPr id="51" name="Text 49"/>
+          <p:cNvPr id="53" name="Text 51"/>
           <p:cNvSpPr/>
           <p:nvPr/>
         </p:nvSpPr>
@@ -29492,7 +29555,7 @@
       </p:sp>
       <p:sp>
         <p:nvSpPr>
-          <p:cNvPr id="52" name="Shape 50"/>
+          <p:cNvPr id="54" name="Shape 52"/>
           <p:cNvSpPr/>
           <p:nvPr/>
         </p:nvSpPr>
@@ -29519,7 +29582,7 @@
       </p:sp>
       <p:sp>
         <p:nvSpPr>
-          <p:cNvPr id="53" name="Text 51"/>
+          <p:cNvPr id="55" name="Text 53"/>
           <p:cNvSpPr/>
           <p:nvPr/>
         </p:nvSpPr>
@@ -29981,7 +30044,7 @@
                 <a:ea typeface="Trebuchet MS" pitchFamily="34" charset="-122"/>
                 <a:cs typeface="Trebuchet MS" pitchFamily="34" charset="-120"/>
               </a:rPr>
-              <a:t>disconnect</a:t>
+              <a:t>connecting</a:t>
             </a:r>
             <a:endParaRPr lang="en-US" sz="2800" dirty="0"/>
           </a:p>
@@ -30808,7 +30871,7 @@
                 <a:ea typeface="Trebuchet MS" pitchFamily="34" charset="-122"/>
                 <a:cs typeface="Trebuchet MS" pitchFamily="34" charset="-120"/>
               </a:rPr>
-              <a:t>disconnect</a:t>
+              <a:t>connecting</a:t>
             </a:r>
             <a:endParaRPr lang="en-US" sz="2800" dirty="0"/>
           </a:p>
@@ -30897,11 +30960,11 @@
             </a:avLst>
           </a:prstGeom>
           <a:solidFill>
-            <a:srgbClr val="DDD6FE"/>
+            <a:srgbClr val="CCFBF1"/>
           </a:solidFill>
           <a:ln w="19050">
             <a:solidFill>
-              <a:srgbClr val="7C3AED"/>
+              <a:srgbClr val="0D9488"/>
             </a:solidFill>
             <a:prstDash val="solid"/>
           </a:ln>
@@ -30941,13 +31004,13 @@
             <a:r>
               <a:rPr lang="en-US" sz="1300" b="1" dirty="0">
                 <a:solidFill>
-                  <a:srgbClr val="4C1D95"/>
+                  <a:srgbClr val="0F766E"/>
                 </a:solidFill>
                 <a:latin typeface="Trebuchet MS" pitchFamily="34" charset="0"/>
                 <a:ea typeface="Trebuchet MS" pitchFamily="34" charset="-122"/>
                 <a:cs typeface="Trebuchet MS" pitchFamily="34" charset="-120"/>
               </a:rPr>
-              <a:t>dis</a:t>
+              <a:t>connect</a:t>
             </a:r>
             <a:endParaRPr lang="en-US" sz="1300" dirty="0"/>
           </a:p>
@@ -30986,7 +31049,7 @@
                 <a:ea typeface="Calibri" pitchFamily="34" charset="-122"/>
                 <a:cs typeface="Calibri" pitchFamily="34" charset="-120"/>
               </a:rPr>
-              <a:t>not or apart</a:t>
+              <a:t>join or link together</a:t>
             </a:r>
             <a:endParaRPr lang="en-US" sz="850" dirty="0"/>
           </a:p>
@@ -31009,11 +31072,11 @@
             </a:avLst>
           </a:prstGeom>
           <a:solidFill>
-            <a:srgbClr val="CCFBF1"/>
+            <a:srgbClr val="FCE7F3"/>
           </a:solidFill>
           <a:ln w="19050">
             <a:solidFill>
-              <a:srgbClr val="0D9488"/>
+              <a:srgbClr val="DB2777"/>
             </a:solidFill>
             <a:prstDash val="solid"/>
           </a:ln>
@@ -31053,13 +31116,13 @@
             <a:r>
               <a:rPr lang="en-US" sz="1300" b="1" dirty="0">
                 <a:solidFill>
-                  <a:srgbClr val="0F766E"/>
+                  <a:srgbClr val="9D174D"/>
                 </a:solidFill>
                 <a:latin typeface="Trebuchet MS" pitchFamily="34" charset="0"/>
                 <a:ea typeface="Trebuchet MS" pitchFamily="34" charset="-122"/>
                 <a:cs typeface="Trebuchet MS" pitchFamily="34" charset="-120"/>
               </a:rPr>
-              <a:t>connect</a:t>
+              <a:t>ing</a:t>
             </a:r>
             <a:endParaRPr lang="en-US" sz="1300" dirty="0"/>
           </a:p>
@@ -31098,7 +31161,7 @@
                 <a:ea typeface="Calibri" pitchFamily="34" charset="-122"/>
                 <a:cs typeface="Calibri" pitchFamily="34" charset="-120"/>
               </a:rPr>
-              <a:t>join or link together</a:t>
+              <a:t>ongoing action</a:t>
             </a:r>
             <a:endParaRPr lang="en-US" sz="850" dirty="0"/>
           </a:p>
@@ -31793,7 +31856,7 @@
                 <a:ea typeface="Trebuchet MS" pitchFamily="34" charset="-122"/>
                 <a:cs typeface="Trebuchet MS" pitchFamily="34" charset="-120"/>
               </a:rPr>
-              <a:t>disconnect</a:t>
+              <a:t>connecting</a:t>
             </a:r>
             <a:endParaRPr lang="en-US" sz="2800" dirty="0"/>
           </a:p>
@@ -31882,11 +31945,11 @@
             </a:avLst>
           </a:prstGeom>
           <a:solidFill>
-            <a:srgbClr val="DDD6FE"/>
+            <a:srgbClr val="CCFBF1"/>
           </a:solidFill>
           <a:ln w="19050">
             <a:solidFill>
-              <a:srgbClr val="7C3AED"/>
+              <a:srgbClr val="0D9488"/>
             </a:solidFill>
             <a:prstDash val="solid"/>
           </a:ln>
@@ -31926,13 +31989,13 @@
             <a:r>
               <a:rPr lang="en-US" sz="1300" b="1" dirty="0">
                 <a:solidFill>
-                  <a:srgbClr val="4C1D95"/>
+                  <a:srgbClr val="0F766E"/>
                 </a:solidFill>
                 <a:latin typeface="Trebuchet MS" pitchFamily="34" charset="0"/>
                 <a:ea typeface="Trebuchet MS" pitchFamily="34" charset="-122"/>
                 <a:cs typeface="Trebuchet MS" pitchFamily="34" charset="-120"/>
               </a:rPr>
-              <a:t>dis</a:t>
+              <a:t>connect</a:t>
             </a:r>
             <a:endParaRPr lang="en-US" sz="1300" dirty="0"/>
           </a:p>
@@ -31971,7 +32034,7 @@
                 <a:ea typeface="Calibri" pitchFamily="34" charset="-122"/>
                 <a:cs typeface="Calibri" pitchFamily="34" charset="-120"/>
               </a:rPr>
-              <a:t>not or apart</a:t>
+              <a:t>join or link together</a:t>
             </a:r>
             <a:endParaRPr lang="en-US" sz="850" dirty="0"/>
           </a:p>
@@ -31994,11 +32057,11 @@
             </a:avLst>
           </a:prstGeom>
           <a:solidFill>
-            <a:srgbClr val="CCFBF1"/>
+            <a:srgbClr val="FCE7F3"/>
           </a:solidFill>
           <a:ln w="19050">
             <a:solidFill>
-              <a:srgbClr val="0D9488"/>
+              <a:srgbClr val="DB2777"/>
             </a:solidFill>
             <a:prstDash val="solid"/>
           </a:ln>
@@ -32038,13 +32101,13 @@
             <a:r>
               <a:rPr lang="en-US" sz="1300" b="1" dirty="0">
                 <a:solidFill>
-                  <a:srgbClr val="0F766E"/>
+                  <a:srgbClr val="9D174D"/>
                 </a:solidFill>
                 <a:latin typeface="Trebuchet MS" pitchFamily="34" charset="0"/>
                 <a:ea typeface="Trebuchet MS" pitchFamily="34" charset="-122"/>
                 <a:cs typeface="Trebuchet MS" pitchFamily="34" charset="-120"/>
               </a:rPr>
-              <a:t>connect</a:t>
+              <a:t>ing</a:t>
             </a:r>
             <a:endParaRPr lang="en-US" sz="1300" dirty="0"/>
           </a:p>
@@ -32083,7 +32146,7 @@
                 <a:ea typeface="Calibri" pitchFamily="34" charset="-122"/>
                 <a:cs typeface="Calibri" pitchFamily="34" charset="-120"/>
               </a:rPr>
-              <a:t>join or link together</a:t>
+              <a:t>ongoing action</a:t>
             </a:r>
             <a:endParaRPr lang="en-US" sz="850" dirty="0"/>
           </a:p>
@@ -32242,7 +32305,7 @@
                 <a:ea typeface="Trebuchet MS" pitchFamily="34" charset="-122"/>
                 <a:cs typeface="Trebuchet MS" pitchFamily="34" charset="-120"/>
               </a:rPr>
-              <a:t>dis</a:t>
+              <a:t>con</a:t>
             </a:r>
             <a:endParaRPr lang="en-US" sz="1400" dirty="0"/>
           </a:p>
@@ -32347,7 +32410,7 @@
                 <a:ea typeface="Trebuchet MS" pitchFamily="34" charset="-122"/>
                 <a:cs typeface="Trebuchet MS" pitchFamily="34" charset="-120"/>
               </a:rPr>
-              <a:t>con</a:t>
+              <a:t>nect</a:t>
             </a:r>
             <a:endParaRPr lang="en-US" sz="1400" dirty="0"/>
           </a:p>
@@ -32452,7 +32515,7 @@
                 <a:ea typeface="Trebuchet MS" pitchFamily="34" charset="-122"/>
                 <a:cs typeface="Trebuchet MS" pitchFamily="34" charset="-120"/>
               </a:rPr>
-              <a:t>nect</a:t>
+              <a:t>ing</a:t>
             </a:r>
             <a:endParaRPr lang="en-US" sz="1400" dirty="0"/>
           </a:p>
@@ -33015,7 +33078,7 @@
                 <a:ea typeface="Trebuchet MS" pitchFamily="34" charset="-122"/>
                 <a:cs typeface="Trebuchet MS" pitchFamily="34" charset="-120"/>
               </a:rPr>
-              <a:t>disconnect</a:t>
+              <a:t>connecting</a:t>
             </a:r>
             <a:endParaRPr lang="en-US" sz="2800" dirty="0"/>
           </a:p>
@@ -33104,11 +33167,11 @@
             </a:avLst>
           </a:prstGeom>
           <a:solidFill>
-            <a:srgbClr val="DDD6FE"/>
+            <a:srgbClr val="CCFBF1"/>
           </a:solidFill>
           <a:ln w="19050">
             <a:solidFill>
-              <a:srgbClr val="7C3AED"/>
+              <a:srgbClr val="0D9488"/>
             </a:solidFill>
             <a:prstDash val="solid"/>
           </a:ln>
@@ -33148,13 +33211,13 @@
             <a:r>
               <a:rPr lang="en-US" sz="1300" b="1" dirty="0">
                 <a:solidFill>
-                  <a:srgbClr val="4C1D95"/>
+                  <a:srgbClr val="0F766E"/>
                 </a:solidFill>
                 <a:latin typeface="Trebuchet MS" pitchFamily="34" charset="0"/>
                 <a:ea typeface="Trebuchet MS" pitchFamily="34" charset="-122"/>
                 <a:cs typeface="Trebuchet MS" pitchFamily="34" charset="-120"/>
               </a:rPr>
-              <a:t>dis</a:t>
+              <a:t>connect</a:t>
             </a:r>
             <a:endParaRPr lang="en-US" sz="1300" dirty="0"/>
           </a:p>
@@ -33193,7 +33256,7 @@
                 <a:ea typeface="Calibri" pitchFamily="34" charset="-122"/>
                 <a:cs typeface="Calibri" pitchFamily="34" charset="-120"/>
               </a:rPr>
-              <a:t>not or apart</a:t>
+              <a:t>join or link together</a:t>
             </a:r>
             <a:endParaRPr lang="en-US" sz="850" dirty="0"/>
           </a:p>
@@ -33216,11 +33279,11 @@
             </a:avLst>
           </a:prstGeom>
           <a:solidFill>
-            <a:srgbClr val="CCFBF1"/>
+            <a:srgbClr val="FCE7F3"/>
           </a:solidFill>
           <a:ln w="19050">
             <a:solidFill>
-              <a:srgbClr val="0D9488"/>
+              <a:srgbClr val="DB2777"/>
             </a:solidFill>
             <a:prstDash val="solid"/>
           </a:ln>
@@ -33260,13 +33323,13 @@
             <a:r>
               <a:rPr lang="en-US" sz="1300" b="1" dirty="0">
                 <a:solidFill>
-                  <a:srgbClr val="0F766E"/>
+                  <a:srgbClr val="9D174D"/>
                 </a:solidFill>
                 <a:latin typeface="Trebuchet MS" pitchFamily="34" charset="0"/>
                 <a:ea typeface="Trebuchet MS" pitchFamily="34" charset="-122"/>
                 <a:cs typeface="Trebuchet MS" pitchFamily="34" charset="-120"/>
               </a:rPr>
-              <a:t>connect</a:t>
+              <a:t>ing</a:t>
             </a:r>
             <a:endParaRPr lang="en-US" sz="1300" dirty="0"/>
           </a:p>
@@ -33305,7 +33368,7 @@
                 <a:ea typeface="Calibri" pitchFamily="34" charset="-122"/>
                 <a:cs typeface="Calibri" pitchFamily="34" charset="-120"/>
               </a:rPr>
-              <a:t>join or link together</a:t>
+              <a:t>ongoing action</a:t>
             </a:r>
             <a:endParaRPr lang="en-US" sz="850" dirty="0"/>
           </a:p>
@@ -33464,7 +33527,7 @@
                 <a:ea typeface="Trebuchet MS" pitchFamily="34" charset="-122"/>
                 <a:cs typeface="Trebuchet MS" pitchFamily="34" charset="-120"/>
               </a:rPr>
-              <a:t>dis</a:t>
+              <a:t>con</a:t>
             </a:r>
             <a:endParaRPr lang="en-US" sz="1400" dirty="0"/>
           </a:p>
@@ -33569,7 +33632,7 @@
                 <a:ea typeface="Trebuchet MS" pitchFamily="34" charset="-122"/>
                 <a:cs typeface="Trebuchet MS" pitchFamily="34" charset="-120"/>
               </a:rPr>
-              <a:t>con</a:t>
+              <a:t>nect</a:t>
             </a:r>
             <a:endParaRPr lang="en-US" sz="1400" dirty="0"/>
           </a:p>
@@ -33674,7 +33737,7 @@
                 <a:ea typeface="Trebuchet MS" pitchFamily="34" charset="-122"/>
                 <a:cs typeface="Trebuchet MS" pitchFamily="34" charset="-120"/>
               </a:rPr>
-              <a:t>nect</a:t>
+              <a:t>ing</a:t>
             </a:r>
             <a:endParaRPr lang="en-US" sz="1400" dirty="0"/>
           </a:p>
@@ -33781,7 +33844,7 @@
         </p:nvSpPr>
         <p:spPr>
           <a:xfrm>
-            <a:off x="2023872" y="4169664"/>
+            <a:off x="2124837" y="4169664"/>
             <a:ext cx="685800" cy="384048"/>
           </a:xfrm>
           <a:prstGeom prst="rect">
@@ -33808,7 +33871,7 @@
         </p:nvSpPr>
         <p:spPr>
           <a:xfrm>
-            <a:off x="2023872" y="4169664"/>
+            <a:off x="2124837" y="4169664"/>
             <a:ext cx="685800" cy="384048"/>
           </a:xfrm>
           <a:prstGeom prst="rect">
@@ -33833,7 +33896,7 @@
                 <a:ea typeface="Trebuchet MS" pitchFamily="34" charset="-122"/>
                 <a:cs typeface="Trebuchet MS" pitchFamily="34" charset="-120"/>
               </a:rPr>
-              <a:t>d</a:t>
+              <a:t>c</a:t>
             </a:r>
             <a:endParaRPr lang="en-US" sz="900" dirty="0"/>
           </a:p>
@@ -33841,13 +33904,52 @@
       </p:sp>
       <p:sp>
         <p:nvSpPr>
-          <p:cNvPr id="38" name="Shape 36"/>
-          <p:cNvSpPr/>
-          <p:nvPr/>
-        </p:nvSpPr>
-        <p:spPr>
-          <a:xfrm>
-            <a:off x="2831592" y="4169664"/>
+          <p:cNvPr id="38" name="Text 36"/>
+          <p:cNvSpPr/>
+          <p:nvPr/>
+        </p:nvSpPr>
+        <p:spPr>
+          <a:xfrm>
+            <a:off x="2124837" y="4572000"/>
+            <a:ext cx="685800" cy="219456"/>
+          </a:xfrm>
+          <a:prstGeom prst="rect">
+            <a:avLst/>
+          </a:prstGeom>
+          <a:noFill/>
+          <a:ln/>
+        </p:spPr>
+        <p:txBody>
+          <a:bodyPr wrap="square" lIns="0" tIns="0" rIns="0" bIns="0" rtlCol="0" anchor="t"/>
+          <a:lstStyle/>
+          <a:p>
+            <a:pPr algn="ctr" indent="0" marL="0">
+              <a:buNone/>
+            </a:pPr>
+            <a:r>
+              <a:rPr lang="en-US" sz="750" i="1" dirty="0">
+                <a:solidFill>
+                  <a:srgbClr val="94A3B8"/>
+                </a:solidFill>
+                <a:latin typeface="Calibri" pitchFamily="34" charset="0"/>
+                <a:ea typeface="Calibri" pitchFamily="34" charset="-122"/>
+                <a:cs typeface="Calibri" pitchFamily="34" charset="-120"/>
+              </a:rPr>
+              <a:t>/k/</a:t>
+            </a:r>
+            <a:endParaRPr lang="en-US" sz="750" dirty="0"/>
+          </a:p>
+        </p:txBody>
+      </p:sp>
+      <p:sp>
+        <p:nvSpPr>
+          <p:cNvPr id="39" name="Shape 37"/>
+          <p:cNvSpPr/>
+          <p:nvPr/>
+        </p:nvSpPr>
+        <p:spPr>
+          <a:xfrm>
+            <a:off x="3033522" y="4169664"/>
             <a:ext cx="685800" cy="384048"/>
           </a:xfrm>
           <a:prstGeom prst="rect">
@@ -33868,13 +33970,13 @@
       </p:sp>
       <p:sp>
         <p:nvSpPr>
-          <p:cNvPr id="39" name="Text 37"/>
-          <p:cNvSpPr/>
-          <p:nvPr/>
-        </p:nvSpPr>
-        <p:spPr>
-          <a:xfrm>
-            <a:off x="2831592" y="4169664"/>
+          <p:cNvPr id="40" name="Text 38"/>
+          <p:cNvSpPr/>
+          <p:nvPr/>
+        </p:nvSpPr>
+        <p:spPr>
+          <a:xfrm>
+            <a:off x="3033522" y="4169664"/>
             <a:ext cx="685800" cy="384048"/>
           </a:xfrm>
           <a:prstGeom prst="rect">
@@ -33899,7 +34001,7 @@
                 <a:ea typeface="Trebuchet MS" pitchFamily="34" charset="-122"/>
                 <a:cs typeface="Trebuchet MS" pitchFamily="34" charset="-120"/>
               </a:rPr>
-              <a:t>i</a:t>
+              <a:t>o</a:t>
             </a:r>
             <a:endParaRPr lang="en-US" sz="900" dirty="0"/>
           </a:p>
@@ -33907,13 +34009,13 @@
       </p:sp>
       <p:sp>
         <p:nvSpPr>
-          <p:cNvPr id="40" name="Shape 38"/>
-          <p:cNvSpPr/>
-          <p:nvPr/>
-        </p:nvSpPr>
-        <p:spPr>
-          <a:xfrm>
-            <a:off x="3639312" y="4169664"/>
+          <p:cNvPr id="41" name="Shape 39"/>
+          <p:cNvSpPr/>
+          <p:nvPr/>
+        </p:nvSpPr>
+        <p:spPr>
+          <a:xfrm>
+            <a:off x="3942207" y="4169664"/>
             <a:ext cx="685800" cy="384048"/>
           </a:xfrm>
           <a:prstGeom prst="rect">
@@ -33934,13 +34036,13 @@
       </p:sp>
       <p:sp>
         <p:nvSpPr>
-          <p:cNvPr id="41" name="Text 39"/>
-          <p:cNvSpPr/>
-          <p:nvPr/>
-        </p:nvSpPr>
-        <p:spPr>
-          <a:xfrm>
-            <a:off x="3639312" y="4169664"/>
+          <p:cNvPr id="42" name="Text 40"/>
+          <p:cNvSpPr/>
+          <p:nvPr/>
+        </p:nvSpPr>
+        <p:spPr>
+          <a:xfrm>
+            <a:off x="3942207" y="4169664"/>
             <a:ext cx="685800" cy="384048"/>
           </a:xfrm>
           <a:prstGeom prst="rect">
@@ -33965,7 +34067,7 @@
                 <a:ea typeface="Trebuchet MS" pitchFamily="34" charset="-122"/>
                 <a:cs typeface="Trebuchet MS" pitchFamily="34" charset="-120"/>
               </a:rPr>
-              <a:t>s</a:t>
+              <a:t>nn</a:t>
             </a:r>
             <a:endParaRPr lang="en-US" sz="900" dirty="0"/>
           </a:p>
@@ -33973,13 +34075,13 @@
       </p:sp>
       <p:sp>
         <p:nvSpPr>
-          <p:cNvPr id="42" name="Shape 40"/>
-          <p:cNvSpPr/>
-          <p:nvPr/>
-        </p:nvSpPr>
-        <p:spPr>
-          <a:xfrm>
-            <a:off x="4447032" y="4169664"/>
+          <p:cNvPr id="43" name="Shape 41"/>
+          <p:cNvSpPr/>
+          <p:nvPr/>
+        </p:nvSpPr>
+        <p:spPr>
+          <a:xfrm>
+            <a:off x="4850892" y="4169664"/>
             <a:ext cx="685800" cy="384048"/>
           </a:xfrm>
           <a:prstGeom prst="rect">
@@ -34000,13 +34102,13 @@
       </p:sp>
       <p:sp>
         <p:nvSpPr>
-          <p:cNvPr id="43" name="Text 41"/>
-          <p:cNvSpPr/>
-          <p:nvPr/>
-        </p:nvSpPr>
-        <p:spPr>
-          <a:xfrm>
-            <a:off x="4447032" y="4169664"/>
+          <p:cNvPr id="44" name="Text 42"/>
+          <p:cNvSpPr/>
+          <p:nvPr/>
+        </p:nvSpPr>
+        <p:spPr>
+          <a:xfrm>
+            <a:off x="4850892" y="4169664"/>
             <a:ext cx="685800" cy="384048"/>
           </a:xfrm>
           <a:prstGeom prst="rect">
@@ -34031,7 +34133,7 @@
                 <a:ea typeface="Trebuchet MS" pitchFamily="34" charset="-122"/>
                 <a:cs typeface="Trebuchet MS" pitchFamily="34" charset="-120"/>
               </a:rPr>
-              <a:t>c</a:t>
+              <a:t>e</a:t>
             </a:r>
             <a:endParaRPr lang="en-US" sz="900" dirty="0"/>
           </a:p>
@@ -34039,13 +34141,79 @@
       </p:sp>
       <p:sp>
         <p:nvSpPr>
-          <p:cNvPr id="44" name="Text 42"/>
-          <p:cNvSpPr/>
-          <p:nvPr/>
-        </p:nvSpPr>
-        <p:spPr>
-          <a:xfrm>
-            <a:off x="4447032" y="4572000"/>
+          <p:cNvPr id="45" name="Shape 43"/>
+          <p:cNvSpPr/>
+          <p:nvPr/>
+        </p:nvSpPr>
+        <p:spPr>
+          <a:xfrm>
+            <a:off x="5759577" y="4169664"/>
+            <a:ext cx="685800" cy="384048"/>
+          </a:xfrm>
+          <a:prstGeom prst="rect">
+            <a:avLst>
+              <a:gd name="adj" fmla="val 9524"/>
+            </a:avLst>
+          </a:prstGeom>
+          <a:solidFill>
+            <a:srgbClr val="FFFFFF"/>
+          </a:solidFill>
+          <a:ln w="12700">
+            <a:solidFill>
+              <a:srgbClr val="DB2777"/>
+            </a:solidFill>
+            <a:prstDash val="solid"/>
+          </a:ln>
+        </p:spPr>
+      </p:sp>
+      <p:sp>
+        <p:nvSpPr>
+          <p:cNvPr id="46" name="Text 44"/>
+          <p:cNvSpPr/>
+          <p:nvPr/>
+        </p:nvSpPr>
+        <p:spPr>
+          <a:xfrm>
+            <a:off x="5759577" y="4169664"/>
+            <a:ext cx="685800" cy="384048"/>
+          </a:xfrm>
+          <a:prstGeom prst="rect">
+            <a:avLst/>
+          </a:prstGeom>
+          <a:noFill/>
+          <a:ln/>
+        </p:spPr>
+        <p:txBody>
+          <a:bodyPr wrap="square" lIns="0" tIns="0" rIns="0" bIns="0" rtlCol="0" anchor="ctr"/>
+          <a:lstStyle/>
+          <a:p>
+            <a:pPr algn="ctr" indent="0" marL="0">
+              <a:buNone/>
+            </a:pPr>
+            <a:r>
+              <a:rPr lang="en-US" sz="900" b="1" dirty="0">
+                <a:solidFill>
+                  <a:srgbClr val="9D174D"/>
+                </a:solidFill>
+                <a:latin typeface="Trebuchet MS" pitchFamily="34" charset="0"/>
+                <a:ea typeface="Trebuchet MS" pitchFamily="34" charset="-122"/>
+                <a:cs typeface="Trebuchet MS" pitchFamily="34" charset="-120"/>
+              </a:rPr>
+              <a:t>ct</a:t>
+            </a:r>
+            <a:endParaRPr lang="en-US" sz="900" dirty="0"/>
+          </a:p>
+        </p:txBody>
+      </p:sp>
+      <p:sp>
+        <p:nvSpPr>
+          <p:cNvPr id="47" name="Text 45"/>
+          <p:cNvSpPr/>
+          <p:nvPr/>
+        </p:nvSpPr>
+        <p:spPr>
+          <a:xfrm>
+            <a:off x="5759577" y="4572000"/>
             <a:ext cx="685800" cy="219456"/>
           </a:xfrm>
           <a:prstGeom prst="rect">
@@ -34070,7 +34238,7 @@
                 <a:ea typeface="Calibri" pitchFamily="34" charset="-122"/>
                 <a:cs typeface="Calibri" pitchFamily="34" charset="-120"/>
               </a:rPr>
-              <a:t>/k/</a:t>
+              <a:t>/kt/</a:t>
             </a:r>
             <a:endParaRPr lang="en-US" sz="750" dirty="0"/>
           </a:p>
@@ -34078,13 +34246,13 @@
       </p:sp>
       <p:sp>
         <p:nvSpPr>
-          <p:cNvPr id="45" name="Shape 43"/>
-          <p:cNvSpPr/>
-          <p:nvPr/>
-        </p:nvSpPr>
-        <p:spPr>
-          <a:xfrm>
-            <a:off x="5254752" y="4169664"/>
+          <p:cNvPr id="48" name="Shape 46"/>
+          <p:cNvSpPr/>
+          <p:nvPr/>
+        </p:nvSpPr>
+        <p:spPr>
+          <a:xfrm>
+            <a:off x="6668262" y="4169664"/>
             <a:ext cx="685800" cy="384048"/>
           </a:xfrm>
           <a:prstGeom prst="rect">
@@ -34105,13 +34273,13 @@
       </p:sp>
       <p:sp>
         <p:nvSpPr>
-          <p:cNvPr id="46" name="Text 44"/>
-          <p:cNvSpPr/>
-          <p:nvPr/>
-        </p:nvSpPr>
-        <p:spPr>
-          <a:xfrm>
-            <a:off x="5254752" y="4169664"/>
+          <p:cNvPr id="49" name="Text 47"/>
+          <p:cNvSpPr/>
+          <p:nvPr/>
+        </p:nvSpPr>
+        <p:spPr>
+          <a:xfrm>
+            <a:off x="6668262" y="4169664"/>
             <a:ext cx="685800" cy="384048"/>
           </a:xfrm>
           <a:prstGeom prst="rect">
@@ -34136,7 +34304,7 @@
                 <a:ea typeface="Trebuchet MS" pitchFamily="34" charset="-122"/>
                 <a:cs typeface="Trebuchet MS" pitchFamily="34" charset="-120"/>
               </a:rPr>
-              <a:t>o</a:t>
+              <a:t>i</a:t>
             </a:r>
             <a:endParaRPr lang="en-US" sz="900" dirty="0"/>
           </a:p>
@@ -34144,13 +34312,13 @@
       </p:sp>
       <p:sp>
         <p:nvSpPr>
-          <p:cNvPr id="47" name="Shape 45"/>
-          <p:cNvSpPr/>
-          <p:nvPr/>
-        </p:nvSpPr>
-        <p:spPr>
-          <a:xfrm>
-            <a:off x="6062472" y="4169664"/>
+          <p:cNvPr id="50" name="Shape 48"/>
+          <p:cNvSpPr/>
+          <p:nvPr/>
+        </p:nvSpPr>
+        <p:spPr>
+          <a:xfrm>
+            <a:off x="7576947" y="4169664"/>
             <a:ext cx="685800" cy="384048"/>
           </a:xfrm>
           <a:prstGeom prst="rect">
@@ -34171,13 +34339,13 @@
       </p:sp>
       <p:sp>
         <p:nvSpPr>
-          <p:cNvPr id="48" name="Text 46"/>
-          <p:cNvSpPr/>
-          <p:nvPr/>
-        </p:nvSpPr>
-        <p:spPr>
-          <a:xfrm>
-            <a:off x="6062472" y="4169664"/>
+          <p:cNvPr id="51" name="Text 49"/>
+          <p:cNvSpPr/>
+          <p:nvPr/>
+        </p:nvSpPr>
+        <p:spPr>
+          <a:xfrm>
+            <a:off x="7576947" y="4169664"/>
             <a:ext cx="685800" cy="384048"/>
           </a:xfrm>
           <a:prstGeom prst="rect">
@@ -34202,180 +34370,9 @@
                 <a:ea typeface="Trebuchet MS" pitchFamily="34" charset="-122"/>
                 <a:cs typeface="Trebuchet MS" pitchFamily="34" charset="-120"/>
               </a:rPr>
-              <a:t>nn</a:t>
+              <a:t>ng</a:t>
             </a:r>
             <a:endParaRPr lang="en-US" sz="900" dirty="0"/>
-          </a:p>
-        </p:txBody>
-      </p:sp>
-      <p:sp>
-        <p:nvSpPr>
-          <p:cNvPr id="49" name="Shape 47"/>
-          <p:cNvSpPr/>
-          <p:nvPr/>
-        </p:nvSpPr>
-        <p:spPr>
-          <a:xfrm>
-            <a:off x="6870192" y="4169664"/>
-            <a:ext cx="685800" cy="384048"/>
-          </a:xfrm>
-          <a:prstGeom prst="rect">
-            <a:avLst>
-              <a:gd name="adj" fmla="val 9524"/>
-            </a:avLst>
-          </a:prstGeom>
-          <a:solidFill>
-            <a:srgbClr val="FFFFFF"/>
-          </a:solidFill>
-          <a:ln w="12700">
-            <a:solidFill>
-              <a:srgbClr val="DB2777"/>
-            </a:solidFill>
-            <a:prstDash val="solid"/>
-          </a:ln>
-        </p:spPr>
-      </p:sp>
-      <p:sp>
-        <p:nvSpPr>
-          <p:cNvPr id="50" name="Text 48"/>
-          <p:cNvSpPr/>
-          <p:nvPr/>
-        </p:nvSpPr>
-        <p:spPr>
-          <a:xfrm>
-            <a:off x="6870192" y="4169664"/>
-            <a:ext cx="685800" cy="384048"/>
-          </a:xfrm>
-          <a:prstGeom prst="rect">
-            <a:avLst/>
-          </a:prstGeom>
-          <a:noFill/>
-          <a:ln/>
-        </p:spPr>
-        <p:txBody>
-          <a:bodyPr wrap="square" lIns="0" tIns="0" rIns="0" bIns="0" rtlCol="0" anchor="ctr"/>
-          <a:lstStyle/>
-          <a:p>
-            <a:pPr algn="ctr" indent="0" marL="0">
-              <a:buNone/>
-            </a:pPr>
-            <a:r>
-              <a:rPr lang="en-US" sz="900" b="1" dirty="0">
-                <a:solidFill>
-                  <a:srgbClr val="9D174D"/>
-                </a:solidFill>
-                <a:latin typeface="Trebuchet MS" pitchFamily="34" charset="0"/>
-                <a:ea typeface="Trebuchet MS" pitchFamily="34" charset="-122"/>
-                <a:cs typeface="Trebuchet MS" pitchFamily="34" charset="-120"/>
-              </a:rPr>
-              <a:t>e</a:t>
-            </a:r>
-            <a:endParaRPr lang="en-US" sz="900" dirty="0"/>
-          </a:p>
-        </p:txBody>
-      </p:sp>
-      <p:sp>
-        <p:nvSpPr>
-          <p:cNvPr id="51" name="Shape 49"/>
-          <p:cNvSpPr/>
-          <p:nvPr/>
-        </p:nvSpPr>
-        <p:spPr>
-          <a:xfrm>
-            <a:off x="7677912" y="4169664"/>
-            <a:ext cx="685800" cy="384048"/>
-          </a:xfrm>
-          <a:prstGeom prst="rect">
-            <a:avLst>
-              <a:gd name="adj" fmla="val 9524"/>
-            </a:avLst>
-          </a:prstGeom>
-          <a:solidFill>
-            <a:srgbClr val="FFFFFF"/>
-          </a:solidFill>
-          <a:ln w="12700">
-            <a:solidFill>
-              <a:srgbClr val="DB2777"/>
-            </a:solidFill>
-            <a:prstDash val="solid"/>
-          </a:ln>
-        </p:spPr>
-      </p:sp>
-      <p:sp>
-        <p:nvSpPr>
-          <p:cNvPr id="52" name="Text 50"/>
-          <p:cNvSpPr/>
-          <p:nvPr/>
-        </p:nvSpPr>
-        <p:spPr>
-          <a:xfrm>
-            <a:off x="7677912" y="4169664"/>
-            <a:ext cx="685800" cy="384048"/>
-          </a:xfrm>
-          <a:prstGeom prst="rect">
-            <a:avLst/>
-          </a:prstGeom>
-          <a:noFill/>
-          <a:ln/>
-        </p:spPr>
-        <p:txBody>
-          <a:bodyPr wrap="square" lIns="0" tIns="0" rIns="0" bIns="0" rtlCol="0" anchor="ctr"/>
-          <a:lstStyle/>
-          <a:p>
-            <a:pPr algn="ctr" indent="0" marL="0">
-              <a:buNone/>
-            </a:pPr>
-            <a:r>
-              <a:rPr lang="en-US" sz="900" b="1" dirty="0">
-                <a:solidFill>
-                  <a:srgbClr val="9D174D"/>
-                </a:solidFill>
-                <a:latin typeface="Trebuchet MS" pitchFamily="34" charset="0"/>
-                <a:ea typeface="Trebuchet MS" pitchFamily="34" charset="-122"/>
-                <a:cs typeface="Trebuchet MS" pitchFamily="34" charset="-120"/>
-              </a:rPr>
-              <a:t>ct</a:t>
-            </a:r>
-            <a:endParaRPr lang="en-US" sz="900" dirty="0"/>
-          </a:p>
-        </p:txBody>
-      </p:sp>
-      <p:sp>
-        <p:nvSpPr>
-          <p:cNvPr id="53" name="Text 51"/>
-          <p:cNvSpPr/>
-          <p:nvPr/>
-        </p:nvSpPr>
-        <p:spPr>
-          <a:xfrm>
-            <a:off x="7677912" y="4572000"/>
-            <a:ext cx="685800" cy="219456"/>
-          </a:xfrm>
-          <a:prstGeom prst="rect">
-            <a:avLst/>
-          </a:prstGeom>
-          <a:noFill/>
-          <a:ln/>
-        </p:spPr>
-        <p:txBody>
-          <a:bodyPr wrap="square" lIns="0" tIns="0" rIns="0" bIns="0" rtlCol="0" anchor="t"/>
-          <a:lstStyle/>
-          <a:p>
-            <a:pPr algn="ctr" indent="0" marL="0">
-              <a:buNone/>
-            </a:pPr>
-            <a:r>
-              <a:rPr lang="en-US" sz="750" i="1" dirty="0">
-                <a:solidFill>
-                  <a:srgbClr val="94A3B8"/>
-                </a:solidFill>
-                <a:latin typeface="Calibri" pitchFamily="34" charset="0"/>
-                <a:ea typeface="Calibri" pitchFamily="34" charset="-122"/>
-                <a:cs typeface="Calibri" pitchFamily="34" charset="-120"/>
-              </a:rPr>
-              <a:t>/kt/</a:t>
-            </a:r>
-            <a:endParaRPr lang="en-US" sz="750" dirty="0"/>
           </a:p>
         </p:txBody>
       </p:sp>
@@ -36135,7 +36132,7 @@
                 <a:ea typeface="Trebuchet MS" pitchFamily="34" charset="-122"/>
                 <a:cs typeface="Trebuchet MS" pitchFamily="34" charset="-120"/>
               </a:rPr>
-              <a:t>dis-</a:t>
+              <a:t>re-</a:t>
             </a:r>
             <a:endParaRPr lang="en-US" sz="1300" dirty="0"/>
           </a:p>
@@ -36327,7 +36324,7 @@
                 <a:ea typeface="Trebuchet MS" pitchFamily="34" charset="-122"/>
                 <a:cs typeface="Trebuchet MS" pitchFamily="34" charset="-120"/>
               </a:rPr>
-              <a:t>re-</a:t>
+              <a:t>dis-</a:t>
             </a:r>
             <a:endParaRPr lang="en-US" sz="1300" dirty="0"/>
           </a:p>
@@ -36722,7 +36719,7 @@
                 <a:ea typeface="Trebuchet MS" pitchFamily="34" charset="-122"/>
                 <a:cs typeface="Trebuchet MS" pitchFamily="34" charset="-120"/>
               </a:rPr>
-              <a:t>-or</a:t>
+              <a:t>-ive</a:t>
             </a:r>
             <a:endParaRPr lang="en-US" sz="1300" dirty="0"/>
           </a:p>
@@ -36875,7 +36872,7 @@
                 <a:ea typeface="Trebuchet MS" pitchFamily="34" charset="-122"/>
                 <a:cs typeface="Trebuchet MS" pitchFamily="34" charset="-120"/>
               </a:rPr>
-              <a:t>-ive</a:t>
+              <a:t>-or</a:t>
             </a:r>
             <a:endParaRPr lang="en-US" sz="1300" dirty="0"/>
           </a:p>
@@ -37310,7 +37307,7 @@
                 <a:ea typeface="Trebuchet MS" pitchFamily="34" charset="-122"/>
                 <a:cs typeface="Trebuchet MS" pitchFamily="34" charset="-120"/>
               </a:rPr>
-              <a:t>interconnect</a:t>
+              <a:t>interconnected</a:t>
             </a:r>
             <a:endParaRPr lang="en-US" sz="1200" dirty="0"/>
           </a:p>
@@ -37376,7 +37373,7 @@
                 <a:ea typeface="Trebuchet MS" pitchFamily="34" charset="-122"/>
                 <a:cs typeface="Trebuchet MS" pitchFamily="34" charset="-120"/>
               </a:rPr>
-              <a:t>connector</a:t>
+              <a:t>connecting</a:t>
             </a:r>
             <a:endParaRPr lang="en-US" sz="1200" dirty="0"/>
           </a:p>
@@ -37442,7 +37439,7 @@
                 <a:ea typeface="Trebuchet MS" pitchFamily="34" charset="-122"/>
                 <a:cs typeface="Trebuchet MS" pitchFamily="34" charset="-120"/>
               </a:rPr>
-              <a:t>connective</a:t>
+              <a:t>connector</a:t>
             </a:r>
             <a:endParaRPr lang="en-US" sz="1200" dirty="0"/>
           </a:p>
@@ -38630,7 +38627,7 @@
                 <a:ea typeface="Calibri" pitchFamily="34" charset="-122"/>
                 <a:cs typeface="Calibri" pitchFamily="34" charset="-120"/>
               </a:rPr>
-              <a:t>1.  The root 'connect' comes from Latin and means to join or link together.</a:t>
+              <a:t>1.  The suffix '-ion' in 'connection' turns the verb into a noun.</a:t>
             </a:r>
             <a:endParaRPr lang="en-US" sz="1300" dirty="0"/>
           </a:p>
@@ -38769,7 +38766,7 @@
                 <a:ea typeface="Calibri" pitchFamily="34" charset="-122"/>
                 <a:cs typeface="Calibri" pitchFamily="34" charset="-120"/>
               </a:rPr>
-              <a:t>2.  The word 'disconnect' means to join two things more firmly together.</a:t>
+              <a:t>2.  The word 'disconnect' uses the prefix 'dis-' to mean the opposite of connecting.</a:t>
             </a:r>
             <a:endParaRPr lang="en-US" sz="1300" dirty="0"/>
           </a:p>
@@ -38792,11 +38789,11 @@
             </a:avLst>
           </a:prstGeom>
           <a:solidFill>
-            <a:srgbClr val="FEE2E2"/>
-          </a:solidFill>
-          <a:ln w="12700">
-            <a:solidFill>
-              <a:srgbClr val="DC2626"/>
+            <a:srgbClr val="DCFCE7"/>
+          </a:solidFill>
+          <a:ln w="12700">
+            <a:solidFill>
+              <a:srgbClr val="16A34A"/>
             </a:solidFill>
             <a:prstDash val="solid"/>
           </a:ln>
@@ -38829,13 +38826,13 @@
             <a:r>
               <a:rPr lang="en-US" sz="1100" b="1" dirty="0">
                 <a:solidFill>
-                  <a:srgbClr val="DC2626"/>
+                  <a:srgbClr val="16A34A"/>
                 </a:solidFill>
                 <a:latin typeface="Trebuchet MS" pitchFamily="34" charset="0"/>
                 <a:ea typeface="Trebuchet MS" pitchFamily="34" charset="-122"/>
                 <a:cs typeface="Trebuchet MS" pitchFamily="34" charset="-120"/>
               </a:rPr>
-              <a:t>FALSE</a:t>
+              <a:t>TRUE</a:t>
             </a:r>
             <a:endParaRPr lang="en-US" sz="1100" dirty="0"/>
           </a:p>
@@ -38908,7 +38905,7 @@
                 <a:ea typeface="Calibri" pitchFamily="34" charset="-122"/>
                 <a:cs typeface="Calibri" pitchFamily="34" charset="-120"/>
               </a:rPr>
-              <a:t>3.  Adding the prefix 're-' to 'connect' makes the word 'reconnect', meaning to join again.</a:t>
+              <a:t>3.  A 'connector' is something that joins two things together.</a:t>
             </a:r>
             <a:endParaRPr lang="en-US" sz="1300" dirty="0"/>
           </a:p>
@@ -39047,7 +39044,7 @@
                 <a:ea typeface="Calibri" pitchFamily="34" charset="-122"/>
                 <a:cs typeface="Calibri" pitchFamily="34" charset="-120"/>
               </a:rPr>
-              <a:t>4.  A 'connector' is something that joins or links things together.</a:t>
+              <a:t>4.  'Reconnect' means to break a link permanently.</a:t>
             </a:r>
             <a:endParaRPr lang="en-US" sz="1300" dirty="0"/>
           </a:p>
@@ -39070,11 +39067,11 @@
             </a:avLst>
           </a:prstGeom>
           <a:solidFill>
-            <a:srgbClr val="DCFCE7"/>
-          </a:solidFill>
-          <a:ln w="12700">
-            <a:solidFill>
-              <a:srgbClr val="16A34A"/>
+            <a:srgbClr val="FEE2E2"/>
+          </a:solidFill>
+          <a:ln w="12700">
+            <a:solidFill>
+              <a:srgbClr val="DC2626"/>
             </a:solidFill>
             <a:prstDash val="solid"/>
           </a:ln>
@@ -39107,13 +39104,13 @@
             <a:r>
               <a:rPr lang="en-US" sz="1100" b="1" dirty="0">
                 <a:solidFill>
-                  <a:srgbClr val="16A34A"/>
+                  <a:srgbClr val="DC2626"/>
                 </a:solidFill>
                 <a:latin typeface="Trebuchet MS" pitchFamily="34" charset="0"/>
                 <a:ea typeface="Trebuchet MS" pitchFamily="34" charset="-122"/>
                 <a:cs typeface="Trebuchet MS" pitchFamily="34" charset="-120"/>
               </a:rPr>
-              <a:t>TRUE</a:t>
+              <a:t>FALSE</a:t>
             </a:r>
             <a:endParaRPr lang="en-US" sz="1100" dirty="0"/>
           </a:p>
@@ -39186,7 +39183,7 @@
                 <a:ea typeface="Calibri" pitchFamily="34" charset="-122"/>
                 <a:cs typeface="Calibri" pitchFamily="34" charset="-120"/>
               </a:rPr>
-              <a:t>5.  The suffix '-ion' in 'connection' means to do something again.</a:t>
+              <a:t>5.  The root 'connect' comes from ancient Greek.</a:t>
             </a:r>
             <a:endParaRPr lang="en-US" sz="1300" dirty="0"/>
           </a:p>
@@ -40155,7 +40152,7 @@
                 <a:ea typeface="Trebuchet MS" pitchFamily="34" charset="-122"/>
                 <a:cs typeface="Trebuchet MS" pitchFamily="34" charset="-120"/>
               </a:rPr>
-              <a:t>interconnect</a:t>
+              <a:t>interconnected</a:t>
             </a:r>
             <a:endParaRPr lang="en-US" sz="1300" dirty="0"/>
           </a:p>
@@ -40221,7 +40218,7 @@
                 <a:ea typeface="Trebuchet MS" pitchFamily="34" charset="-122"/>
                 <a:cs typeface="Trebuchet MS" pitchFamily="34" charset="-120"/>
               </a:rPr>
-              <a:t>connector</a:t>
+              <a:t>connecting</a:t>
             </a:r>
             <a:endParaRPr lang="en-US" sz="1300" dirty="0"/>
           </a:p>
@@ -40814,7 +40811,7 @@
                 <a:ea typeface="Trebuchet MS" pitchFamily="34" charset="-122"/>
                 <a:cs typeface="Trebuchet MS" pitchFamily="34" charset="-120"/>
               </a:rPr>
-              <a:t>dis-</a:t>
+              <a:t>re-</a:t>
             </a:r>
             <a:endParaRPr lang="en-US" sz="1300" dirty="0"/>
           </a:p>
@@ -41006,7 +41003,7 @@
                 <a:ea typeface="Trebuchet MS" pitchFamily="34" charset="-122"/>
                 <a:cs typeface="Trebuchet MS" pitchFamily="34" charset="-120"/>
               </a:rPr>
-              <a:t>re-</a:t>
+              <a:t>dis-</a:t>
             </a:r>
             <a:endParaRPr lang="en-US" sz="1300" dirty="0"/>
           </a:p>
@@ -41401,7 +41398,7 @@
                 <a:ea typeface="Trebuchet MS" pitchFamily="34" charset="-122"/>
                 <a:cs typeface="Trebuchet MS" pitchFamily="34" charset="-120"/>
               </a:rPr>
-              <a:t>-or</a:t>
+              <a:t>-ive</a:t>
             </a:r>
             <a:endParaRPr lang="en-US" sz="1300" dirty="0"/>
           </a:p>
@@ -41554,7 +41551,7 @@
                 <a:ea typeface="Trebuchet MS" pitchFamily="34" charset="-122"/>
                 <a:cs typeface="Trebuchet MS" pitchFamily="34" charset="-120"/>
               </a:rPr>
-              <a:t>-ive</a:t>
+              <a:t>-or</a:t>
             </a:r>
             <a:endParaRPr lang="en-US" sz="1300" dirty="0"/>
           </a:p>
@@ -41608,7 +41605,7 @@
         <p:spPr>
           <a:xfrm>
             <a:off x="1508760" y="4178808"/>
-            <a:ext cx="950976" cy="420624"/>
+            <a:ext cx="822960" cy="420624"/>
           </a:xfrm>
           <a:prstGeom prst="rect">
             <a:avLst>
@@ -41642,7 +41639,7 @@
         <p:spPr>
           <a:xfrm>
             <a:off x="1508760" y="4178808"/>
-            <a:ext cx="950976" cy="420624"/>
+            <a:ext cx="822960" cy="420624"/>
           </a:xfrm>
           <a:prstGeom prst="rect">
             <a:avLst/>
@@ -41666,7 +41663,7 @@
                 <a:ea typeface="Trebuchet MS" pitchFamily="34" charset="-122"/>
                 <a:cs typeface="Trebuchet MS" pitchFamily="34" charset="-120"/>
               </a:rPr>
-              <a:t>dis-</a:t>
+              <a:t>re-</a:t>
             </a:r>
             <a:endParaRPr lang="en-US" sz="1300" dirty="0"/>
           </a:p>
@@ -41680,7 +41677,7 @@
         </p:nvSpPr>
         <p:spPr>
           <a:xfrm>
-            <a:off x="2487168" y="4178808"/>
+            <a:off x="2359152" y="4178808"/>
             <a:ext cx="320040" cy="420624"/>
           </a:xfrm>
           <a:prstGeom prst="rect">
@@ -41719,7 +41716,7 @@
         </p:nvSpPr>
         <p:spPr>
           <a:xfrm>
-            <a:off x="2834640" y="4178808"/>
+            <a:off x="2706624" y="4178808"/>
             <a:ext cx="1682496" cy="420624"/>
           </a:xfrm>
           <a:prstGeom prst="rect">
@@ -41753,7 +41750,7 @@
         </p:nvSpPr>
         <p:spPr>
           <a:xfrm>
-            <a:off x="2834640" y="4178808"/>
+            <a:off x="2706624" y="4178808"/>
             <a:ext cx="1682496" cy="420624"/>
           </a:xfrm>
           <a:prstGeom prst="rect">
@@ -41792,7 +41789,7 @@
         </p:nvSpPr>
         <p:spPr>
           <a:xfrm>
-            <a:off x="4544568" y="4178808"/>
+            <a:off x="4416552" y="4178808"/>
             <a:ext cx="320040" cy="420624"/>
           </a:xfrm>
           <a:prstGeom prst="rect">
@@ -41831,7 +41828,7 @@
         </p:nvSpPr>
         <p:spPr>
           <a:xfrm>
-            <a:off x="4892040" y="4178808"/>
+            <a:off x="4764024" y="4178808"/>
             <a:ext cx="950976" cy="420624"/>
           </a:xfrm>
           <a:prstGeom prst="rect">
@@ -41865,7 +41862,7 @@
         </p:nvSpPr>
         <p:spPr>
           <a:xfrm>
-            <a:off x="4892040" y="4178808"/>
+            <a:off x="4764024" y="4178808"/>
             <a:ext cx="950976" cy="420624"/>
           </a:xfrm>
           <a:prstGeom prst="rect">
@@ -41904,7 +41901,7 @@
         </p:nvSpPr>
         <p:spPr>
           <a:xfrm>
-            <a:off x="5916168" y="4178808"/>
+            <a:off x="5788152" y="4178808"/>
             <a:ext cx="365760" cy="420624"/>
           </a:xfrm>
           <a:prstGeom prst="rect">
@@ -41943,7 +41940,7 @@
         </p:nvSpPr>
         <p:spPr>
           <a:xfrm>
-            <a:off x="6327648" y="4178808"/>
+            <a:off x="6199632" y="4178808"/>
             <a:ext cx="2194560" cy="420624"/>
           </a:xfrm>
           <a:prstGeom prst="rect">
@@ -41970,7 +41967,7 @@
         </p:nvSpPr>
         <p:spPr>
           <a:xfrm>
-            <a:off x="6327648" y="4178808"/>
+            <a:off x="6199632" y="4178808"/>
             <a:ext cx="2194560" cy="420624"/>
           </a:xfrm>
           <a:prstGeom prst="rect">
@@ -42465,7 +42462,7 @@
                 <a:ea typeface="Calibri" pitchFamily="34" charset="-122"/>
                 <a:cs typeface="Calibri" pitchFamily="34" charset="-120"/>
               </a:rPr>
-              <a:t>A person or thing that joins other things together.</a:t>
+              <a:t>In the process of joining or linking things together.</a:t>
             </a:r>
             <a:endParaRPr lang="en-US" sz="1200" dirty="0"/>
           </a:p>
@@ -42604,7 +42601,7 @@
                 <a:ea typeface="Calibri" pitchFamily="34" charset="-122"/>
                 <a:cs typeface="Calibri" pitchFamily="34" charset="-120"/>
               </a:rPr>
-              <a:t>To break the link between two things.</a:t>
+              <a:t>To break the link between two things so they are no longer joined.</a:t>
             </a:r>
             <a:endParaRPr lang="en-US" sz="1200" dirty="0"/>
           </a:p>
@@ -42743,7 +42740,7 @@
                 <a:ea typeface="Calibri" pitchFamily="34" charset="-122"/>
                 <a:cs typeface="Calibri" pitchFamily="34" charset="-120"/>
               </a:rPr>
-              <a:t>When many things are all linked to each other.</a:t>
+              <a:t>When many things are all linked together with each other.</a:t>
             </a:r>
             <a:endParaRPr lang="en-US" sz="1200" dirty="0"/>
           </a:p>
@@ -42882,7 +42879,7 @@
                 <a:ea typeface="Calibri" pitchFamily="34" charset="-122"/>
                 <a:cs typeface="Calibri" pitchFamily="34" charset="-120"/>
               </a:rPr>
-              <a:t>To join something back together after it was separated.</a:t>
+              <a:t>To join something back together again after it has been separated.</a:t>
             </a:r>
             <a:endParaRPr lang="en-US" sz="1200" dirty="0"/>
           </a:p>
@@ -43021,7 +43018,7 @@
                 <a:ea typeface="Calibri" pitchFamily="34" charset="-122"/>
                 <a:cs typeface="Calibri" pitchFamily="34" charset="-120"/>
               </a:rPr>
-              <a:t>To join two or more things together.</a:t>
+              <a:t>To join two or more things together so they work or belong as one.</a:t>
             </a:r>
             <a:endParaRPr lang="en-US" sz="1200" dirty="0"/>
           </a:p>
@@ -43094,7 +43091,7 @@
                 <a:ea typeface="Trebuchet MS" pitchFamily="34" charset="-122"/>
                 <a:cs typeface="Trebuchet MS" pitchFamily="34" charset="-120"/>
               </a:rPr>
-              <a:t>interconnect</a:t>
+              <a:t>interconnected</a:t>
             </a:r>
             <a:endParaRPr lang="en-US" sz="1200" dirty="0"/>
           </a:p>
@@ -43160,7 +43157,7 @@
                 <a:ea typeface="Calibri" pitchFamily="34" charset="-122"/>
                 <a:cs typeface="Calibri" pitchFamily="34" charset="-120"/>
               </a:rPr>
-              <a:t>A link or bond between two things or people.</a:t>
+              <a:t>A link or relationship between two or more things or people.</a:t>
             </a:r>
             <a:endParaRPr lang="en-US" sz="1200" dirty="0"/>
           </a:p>
@@ -43233,7 +43230,7 @@
                 <a:ea typeface="Trebuchet MS" pitchFamily="34" charset="-122"/>
                 <a:cs typeface="Trebuchet MS" pitchFamily="34" charset="-120"/>
               </a:rPr>
-              <a:t>connector</a:t>
+              <a:t>connecting</a:t>
             </a:r>
             <a:endParaRPr lang="en-US" sz="1200" dirty="0"/>
           </a:p>
@@ -43299,7 +43296,7 @@
                 <a:ea typeface="Calibri" pitchFamily="34" charset="-122"/>
                 <a:cs typeface="Calibri" pitchFamily="34" charset="-120"/>
               </a:rPr>
-              <a:t>Joined or linked to something else.</a:t>
+              <a:t>Joined or linked together with something else.</a:t>
             </a:r>
             <a:endParaRPr lang="en-US" sz="1200" dirty="0"/>
           </a:p>
@@ -43794,7 +43791,7 @@
                 <a:ea typeface="Calibri" pitchFamily="34" charset="-122"/>
                 <a:cs typeface="Calibri" pitchFamily="34" charset="-120"/>
               </a:rPr>
-              <a:t>We need to connect the two wires carefully so the circuit will work.</a:t>
+              <a:t>We need to connect the two wires carefully so the circuit works properly.</a:t>
             </a:r>
             <a:endParaRPr lang="en-US" sz="1500" dirty="0"/>
           </a:p>
@@ -43958,7 +43955,7 @@
                 <a:ea typeface="Calibri" pitchFamily="34" charset="-122"/>
                 <a:cs typeface="Calibri" pitchFamily="34" charset="-120"/>
               </a:rPr>
-              <a:t>The teacher explained that a strong connection between ideas makes your writing much clearer.</a:t>
+              <a:t>After moving to a new school, Mia worked hard to reconnect with her old friends online.</a:t>
             </a:r>
             <a:endParaRPr lang="en-US" sz="1500" dirty="0"/>
           </a:p>
@@ -44122,7 +44119,7 @@
                 <a:ea typeface="Calibri" pitchFamily="34" charset="-122"/>
                 <a:cs typeface="Calibri" pitchFamily="34" charset="-120"/>
               </a:rPr>
-              <a:t>After the storm, engineers worked quickly to reconnect the power lines to people's homes.</a:t>
+              <a:t>The teacher explained that there is a strong connection between eating well and feeling healthy.</a:t>
             </a:r>
             <a:endParaRPr lang="en-US" sz="1500" dirty="0"/>
           </a:p>
